--- a/preview_v7/bio/l-bio-sx1-u1-2.pptx
+++ b/preview_v7/bio/l-bio-sx1-u1-2.pptx
@@ -3111,7 +3111,7 @@
             <a:avLst/>
           </a:prstGeom>
           <a:solidFill>
-            <a:srgbClr val="F4EFE6"/>
+            <a:srgbClr val="1C2A33"/>
           </a:solidFill>
           <a:ln>
             <a:noFill/>
@@ -3142,177 +3142,14 @@
       </p:sp>
       <p:sp>
         <p:nvSpPr>
-          <p:cNvPr id="3" name="TextBox 2"/>
-          <p:cNvSpPr txBox="1"/>
-          <p:nvPr/>
-        </p:nvSpPr>
-        <p:spPr>
-          <a:xfrm>
-            <a:off x="640080" y="640080"/>
-            <a:ext cx="10911535" cy="502920"/>
-          </a:xfrm>
-          <a:prstGeom prst="rect">
-            <a:avLst/>
-          </a:prstGeom>
-          <a:noFill/>
-        </p:spPr>
-        <p:txBody>
-          <a:bodyPr wrap="square" anchor="t" lIns="0" rIns="0" tIns="0" bIns="0">
-            <a:spAutoFit/>
-          </a:bodyPr>
-          <a:lstStyle/>
-          <a:p>
-            <a:pPr algn="l">
-              <a:spcAft>
-                <a:spcPts val="0"/>
-              </a:spcAft>
-            </a:pPr>
-            <a:r>
-              <a:rPr sz="1200" b="1">
-                <a:solidFill>
-                  <a:srgbClr val="B23A2A"/>
-                </a:solidFill>
-                <a:latin typeface="微软雅黑"/>
-                <a:ea typeface="微软雅黑"/>
-                <a:cs typeface="微软雅黑"/>
-              </a:rPr>
-              <a:t>生物 · 选择性必修1 稳态与调节 · 第1单元 人体的内环境与稳态</a:t>
-            </a:r>
-          </a:p>
-        </p:txBody>
-      </p:sp>
-      <p:sp>
-        <p:nvSpPr>
-          <p:cNvPr id="4" name="Rectangle 3"/>
+          <p:cNvPr id="3" name="Rectangle 2"/>
           <p:cNvSpPr/>
           <p:nvPr/>
         </p:nvSpPr>
         <p:spPr>
           <a:xfrm>
-            <a:off x="640080" y="1207008"/>
-            <a:ext cx="822960" cy="30480"/>
-          </a:xfrm>
-          <a:prstGeom prst="rect">
-            <a:avLst/>
-          </a:prstGeom>
-          <a:solidFill>
-            <a:srgbClr val="B23A2A"/>
-          </a:solidFill>
-          <a:ln>
-            <a:noFill/>
-          </a:ln>
-          <a:effectLst/>
-        </p:spPr>
-        <p:style>
-          <a:lnRef idx="1">
-            <a:schemeClr val="accent1"/>
-          </a:lnRef>
-          <a:fillRef idx="3">
-            <a:schemeClr val="accent1"/>
-          </a:fillRef>
-          <a:effectRef idx="2">
-            <a:schemeClr val="accent1"/>
-          </a:effectRef>
-          <a:fontRef idx="minor">
-            <a:schemeClr val="lt1"/>
-          </a:fontRef>
-        </p:style>
-        <p:txBody>
-          <a:bodyPr rtlCol="0" anchor="ctr"/>
-          <a:lstStyle/>
-          <a:p>
-            <a:pPr algn="ctr"/>
-          </a:p>
-        </p:txBody>
-      </p:sp>
-      <p:sp>
-        <p:nvSpPr>
-          <p:cNvPr id="5" name="TextBox 4"/>
-          <p:cNvSpPr txBox="1"/>
-          <p:nvPr/>
-        </p:nvSpPr>
-        <p:spPr>
-          <a:xfrm>
-            <a:off x="640080" y="1737360"/>
-            <a:ext cx="10911535" cy="2011680"/>
-          </a:xfrm>
-          <a:prstGeom prst="rect">
-            <a:avLst/>
-          </a:prstGeom>
-          <a:noFill/>
-        </p:spPr>
-        <p:txBody>
-          <a:bodyPr wrap="square" anchor="t" lIns="0" rIns="0" tIns="0" bIns="0">
-            <a:spAutoFit/>
-          </a:bodyPr>
-          <a:lstStyle/>
-          <a:p>
-            <a:pPr algn="l">
-              <a:lnSpc>
-                <a:spcPct val="115000"/>
-              </a:lnSpc>
-            </a:pPr>
-            <a:r>
-              <a:rPr sz="4000" b="1">
-                <a:solidFill>
-                  <a:srgbClr val="1C2A33"/>
-                </a:solidFill>
-                <a:latin typeface="楷体"/>
-                <a:ea typeface="楷体"/>
-                <a:cs typeface="楷体"/>
-              </a:rPr>
-              <a:t>内环境的稳态</a:t>
-            </a:r>
-          </a:p>
-        </p:txBody>
-      </p:sp>
-      <p:sp>
-        <p:nvSpPr>
-          <p:cNvPr id="6" name="TextBox 5"/>
-          <p:cNvSpPr txBox="1"/>
-          <p:nvPr/>
-        </p:nvSpPr>
-        <p:spPr>
-          <a:xfrm>
-            <a:off x="640080" y="3840480"/>
-            <a:ext cx="10911535" cy="457200"/>
-          </a:xfrm>
-          <a:prstGeom prst="rect">
-            <a:avLst/>
-          </a:prstGeom>
-          <a:noFill/>
-        </p:spPr>
-        <p:txBody>
-          <a:bodyPr wrap="square" anchor="t" lIns="0" rIns="0" tIns="0" bIns="0">
-            <a:spAutoFit/>
-          </a:bodyPr>
-          <a:lstStyle/>
-          <a:p>
-            <a:pPr algn="l"/>
-            <a:r>
-              <a:rPr sz="1700" b="1">
-                <a:solidFill>
-                  <a:srgbClr val="B23A2A"/>
-                </a:solidFill>
-                <a:latin typeface="微软雅黑"/>
-                <a:ea typeface="微软雅黑"/>
-                <a:cs typeface="微软雅黑"/>
-              </a:rPr>
-              <a:t>新课  ·  第2课时  ·  45分钟</a:t>
-            </a:r>
-          </a:p>
-        </p:txBody>
-      </p:sp>
-      <p:sp>
-        <p:nvSpPr>
-          <p:cNvPr id="7" name="Rectangle 6"/>
-          <p:cNvSpPr/>
-          <p:nvPr/>
-        </p:nvSpPr>
-        <p:spPr>
-          <a:xfrm>
-            <a:off x="640080" y="5394960"/>
-            <a:ext cx="2011680" cy="33020"/>
+            <a:off x="640080" y="960120"/>
+            <a:ext cx="822960" cy="38100"/>
           </a:xfrm>
           <a:prstGeom prst="rect">
             <a:avLst/>
@@ -3349,14 +3186,14 @@
       </p:sp>
       <p:sp>
         <p:nvSpPr>
-          <p:cNvPr id="8" name="TextBox 7"/>
+          <p:cNvPr id="4" name="TextBox 3"/>
           <p:cNvSpPr txBox="1"/>
           <p:nvPr/>
         </p:nvSpPr>
         <p:spPr>
           <a:xfrm>
-            <a:off x="640080" y="5623560"/>
-            <a:ext cx="10911535" cy="548640"/>
+            <a:off x="640080" y="1143000"/>
+            <a:ext cx="10058400" cy="365760"/>
           </a:xfrm>
           <a:prstGeom prst="rect">
             <a:avLst/>
@@ -3369,17 +3206,191 @@
           </a:bodyPr>
           <a:lstStyle/>
           <a:p>
-            <a:pPr algn="l"/>
-            <a:r>
-              <a:rPr sz="1400" b="0">
-                <a:solidFill>
-                  <a:srgbClr val="6B6258"/>
+            <a:pPr algn="ctr">
+              <a:lnSpc>
+                <a:spcPct val="120000"/>
+              </a:lnSpc>
+            </a:pPr>
+            <a:r>
+              <a:rPr sz="1500" b="1">
+                <a:solidFill>
+                  <a:srgbClr val="C8A86B"/>
                 </a:solidFill>
                 <a:latin typeface="微软雅黑"/>
                 <a:ea typeface="微软雅黑"/>
                 <a:cs typeface="微软雅黑"/>
               </a:rPr>
-              <a:t>学习任务群：    |    年级：高二</a:t>
+              <a:t>选择性必修1 稳态与调节 · 人体的内环境与稳态</a:t>
+            </a:r>
+          </a:p>
+        </p:txBody>
+      </p:sp>
+      <p:sp>
+        <p:nvSpPr>
+          <p:cNvPr id="5" name="TextBox 4"/>
+          <p:cNvSpPr txBox="1"/>
+          <p:nvPr/>
+        </p:nvSpPr>
+        <p:spPr>
+          <a:xfrm>
+            <a:off x="640080" y="1554480"/>
+            <a:ext cx="10911535" cy="1554480"/>
+          </a:xfrm>
+          <a:prstGeom prst="rect">
+            <a:avLst/>
+          </a:prstGeom>
+          <a:noFill/>
+        </p:spPr>
+        <p:txBody>
+          <a:bodyPr wrap="square" anchor="t" lIns="0" rIns="0" tIns="0" bIns="0">
+            <a:spAutoFit/>
+          </a:bodyPr>
+          <a:lstStyle/>
+          <a:p>
+            <a:pPr algn="l">
+              <a:lnSpc>
+                <a:spcPct val="115000"/>
+              </a:lnSpc>
+            </a:pPr>
+            <a:r>
+              <a:rPr sz="4000" b="1">
+                <a:solidFill>
+                  <a:srgbClr val="FFFFFF"/>
+                </a:solidFill>
+                <a:latin typeface="楷体"/>
+                <a:ea typeface="楷体"/>
+                <a:cs typeface="楷体"/>
+              </a:rPr>
+              <a:t>内环境的稳态</a:t>
+            </a:r>
+          </a:p>
+        </p:txBody>
+      </p:sp>
+      <p:sp>
+        <p:nvSpPr>
+          <p:cNvPr id="6" name="TextBox 5"/>
+          <p:cNvSpPr txBox="1"/>
+          <p:nvPr/>
+        </p:nvSpPr>
+        <p:spPr>
+          <a:xfrm>
+            <a:off x="640080" y="3200400"/>
+            <a:ext cx="10911535" cy="914400"/>
+          </a:xfrm>
+          <a:prstGeom prst="rect">
+            <a:avLst/>
+          </a:prstGeom>
+          <a:noFill/>
+        </p:spPr>
+        <p:txBody>
+          <a:bodyPr wrap="square" anchor="t" lIns="0" rIns="0" tIns="0" bIns="0">
+            <a:spAutoFit/>
+          </a:bodyPr>
+          <a:lstStyle/>
+          <a:p>
+            <a:pPr algn="l">
+              <a:lnSpc>
+                <a:spcPct val="145000"/>
+              </a:lnSpc>
+              <a:spcAft>
+                <a:spcPts val="0"/>
+              </a:spcAft>
+            </a:pPr>
+            <a:r>
+              <a:rPr sz="1600" b="0">
+                <a:solidFill>
+                  <a:srgbClr val="E7DFD2"/>
+                </a:solidFill>
+                <a:latin typeface="楷体"/>
+                <a:ea typeface="楷体"/>
+                <a:cs typeface="楷体"/>
+              </a:rPr>
+              <a:t>稳态：正常机体通过调节作用，使内环境的理化性质（渗透压、pH、温度等）保持相对稳定的状态。</a:t>
+            </a:r>
+          </a:p>
+        </p:txBody>
+      </p:sp>
+      <p:sp>
+        <p:nvSpPr>
+          <p:cNvPr id="7" name="Rectangle 6"/>
+          <p:cNvSpPr/>
+          <p:nvPr/>
+        </p:nvSpPr>
+        <p:spPr>
+          <a:xfrm>
+            <a:off x="0" y="5989320"/>
+            <a:ext cx="12191695" cy="868680"/>
+          </a:xfrm>
+          <a:prstGeom prst="rect">
+            <a:avLst/>
+          </a:prstGeom>
+          <a:solidFill>
+            <a:srgbClr val="2E7D6B"/>
+          </a:solidFill>
+          <a:ln>
+            <a:noFill/>
+          </a:ln>
+          <a:effectLst/>
+        </p:spPr>
+        <p:style>
+          <a:lnRef idx="1">
+            <a:schemeClr val="accent1"/>
+          </a:lnRef>
+          <a:fillRef idx="3">
+            <a:schemeClr val="accent1"/>
+          </a:fillRef>
+          <a:effectRef idx="2">
+            <a:schemeClr val="accent1"/>
+          </a:effectRef>
+          <a:fontRef idx="minor">
+            <a:schemeClr val="lt1"/>
+          </a:fontRef>
+        </p:style>
+        <p:txBody>
+          <a:bodyPr rtlCol="0" anchor="ctr"/>
+          <a:lstStyle/>
+          <a:p>
+            <a:pPr algn="ctr"/>
+          </a:p>
+        </p:txBody>
+      </p:sp>
+      <p:sp>
+        <p:nvSpPr>
+          <p:cNvPr id="8" name="TextBox 7"/>
+          <p:cNvSpPr txBox="1"/>
+          <p:nvPr/>
+        </p:nvSpPr>
+        <p:spPr>
+          <a:xfrm>
+            <a:off x="640080" y="5989320"/>
+            <a:ext cx="10911535" cy="868680"/>
+          </a:xfrm>
+          <a:prstGeom prst="rect">
+            <a:avLst/>
+          </a:prstGeom>
+          <a:noFill/>
+        </p:spPr>
+        <p:txBody>
+          <a:bodyPr wrap="square" anchor="ctr" lIns="0" rIns="0" tIns="0" bIns="0">
+            <a:spAutoFit/>
+          </a:bodyPr>
+          <a:lstStyle/>
+          <a:p>
+            <a:pPr algn="l">
+              <a:lnSpc>
+                <a:spcPct val="130000"/>
+              </a:lnSpc>
+            </a:pPr>
+            <a:r>
+              <a:rPr sz="1400" b="0">
+                <a:solidFill>
+                  <a:srgbClr val="FFFFFF"/>
+                </a:solidFill>
+                <a:latin typeface="微软雅黑"/>
+                <a:ea typeface="微软雅黑"/>
+                <a:cs typeface="微软雅黑"/>
+              </a:rPr>
+              <a:t>高中生物 · 学生版课堂 · 第 二 课时</a:t>
             </a:r>
           </a:p>
         </p:txBody>
@@ -3519,7 +3530,7 @@
                 <a:ea typeface="微软雅黑"/>
                 <a:cs typeface="微软雅黑"/>
               </a:rPr>
-              <a:t>学习目标</a:t>
+              <a:t>本课目标</a:t>
             </a:r>
           </a:p>
         </p:txBody>
@@ -3570,14 +3581,55 @@
       </p:sp>
       <p:sp>
         <p:nvSpPr>
-          <p:cNvPr id="5" name="Rounded Rectangle 4"/>
+          <p:cNvPr id="5" name="TextBox 4"/>
+          <p:cNvSpPr txBox="1"/>
+          <p:nvPr/>
+        </p:nvSpPr>
+        <p:spPr>
+          <a:xfrm>
+            <a:off x="640080" y="1325880"/>
+            <a:ext cx="10911535" cy="548640"/>
+          </a:xfrm>
+          <a:prstGeom prst="rect">
+            <a:avLst/>
+          </a:prstGeom>
+          <a:noFill/>
+        </p:spPr>
+        <p:txBody>
+          <a:bodyPr wrap="square" anchor="t" lIns="0" rIns="0" tIns="0" bIns="0">
+            <a:spAutoFit/>
+          </a:bodyPr>
+          <a:lstStyle/>
+          <a:p>
+            <a:pPr algn="l">
+              <a:lnSpc>
+                <a:spcPct val="130000"/>
+              </a:lnSpc>
+            </a:pPr>
+            <a:r>
+              <a:rPr sz="3000" b="1">
+                <a:solidFill>
+                  <a:srgbClr val="1C2A33"/>
+                </a:solidFill>
+                <a:latin typeface="楷体"/>
+                <a:ea typeface="楷体"/>
+                <a:cs typeface="楷体"/>
+              </a:rPr>
+              <a:t>四向学习目标</a:t>
+            </a:r>
+          </a:p>
+        </p:txBody>
+      </p:sp>
+      <p:sp>
+        <p:nvSpPr>
+          <p:cNvPr id="6" name="Rounded Rectangle 5"/>
           <p:cNvSpPr/>
           <p:nvPr/>
         </p:nvSpPr>
         <p:spPr>
           <a:xfrm>
-            <a:off x="640080" y="1417320"/>
-            <a:ext cx="5349240" cy="2057400"/>
+            <a:off x="640080" y="2194560"/>
+            <a:ext cx="2453563" cy="3840480"/>
           </a:xfrm>
           <a:prstGeom prst="roundRect">
             <a:avLst/>
@@ -3585,7 +3637,7 @@
           <a:solidFill>
             <a:srgbClr val="FFFFFF"/>
           </a:solidFill>
-          <a:ln w="22860">
+          <a:ln w="20320">
             <a:solidFill>
               <a:srgbClr val="B23A2A"/>
             </a:solidFill>
@@ -3616,14 +3668,14 @@
       </p:sp>
       <p:sp>
         <p:nvSpPr>
-          <p:cNvPr id="6" name="Oval 5"/>
+          <p:cNvPr id="7" name="Oval 6"/>
           <p:cNvSpPr/>
           <p:nvPr/>
         </p:nvSpPr>
         <p:spPr>
           <a:xfrm>
-            <a:off x="804672" y="1581912"/>
-            <a:ext cx="457200" cy="457200"/>
+            <a:off x="1501101" y="2468880"/>
+            <a:ext cx="731520" cy="731520"/>
           </a:xfrm>
           <a:prstGeom prst="ellipse">
             <a:avLst/>
@@ -3660,14 +3712,14 @@
       </p:sp>
       <p:sp>
         <p:nvSpPr>
-          <p:cNvPr id="7" name="TextBox 6"/>
+          <p:cNvPr id="8" name="TextBox 7"/>
           <p:cNvSpPr txBox="1"/>
           <p:nvPr/>
         </p:nvSpPr>
         <p:spPr>
           <a:xfrm>
-            <a:off x="804672" y="1636776"/>
-            <a:ext cx="457200" cy="384048"/>
+            <a:off x="1501101" y="2578608"/>
+            <a:ext cx="731520" cy="457200"/>
           </a:xfrm>
           <a:prstGeom prst="rect">
             <a:avLst/>
@@ -3680,9 +3732,13 @@
           </a:bodyPr>
           <a:lstStyle/>
           <a:p>
-            <a:pPr algn="ctr"/>
-            <a:r>
-              <a:rPr sz="1600" b="1">
+            <a:pPr algn="ctr">
+              <a:lnSpc>
+                <a:spcPct val="120000"/>
+              </a:lnSpc>
+            </a:pPr>
+            <a:r>
+              <a:rPr sz="2200" b="1">
                 <a:solidFill>
                   <a:srgbClr val="FFFFFF"/>
                 </a:solidFill>
@@ -3697,14 +3753,14 @@
       </p:sp>
       <p:sp>
         <p:nvSpPr>
-          <p:cNvPr id="8" name="TextBox 7"/>
+          <p:cNvPr id="9" name="TextBox 8"/>
           <p:cNvSpPr txBox="1"/>
           <p:nvPr/>
         </p:nvSpPr>
         <p:spPr>
           <a:xfrm>
-            <a:off x="1371600" y="1527048"/>
-            <a:ext cx="4434840" cy="457200"/>
+            <a:off x="822960" y="3429000"/>
+            <a:ext cx="2087803" cy="2377440"/>
           </a:xfrm>
           <a:prstGeom prst="rect">
             <a:avLst/>
@@ -3717,54 +3773,13 @@
           </a:bodyPr>
           <a:lstStyle/>
           <a:p>
-            <a:pPr algn="l">
+            <a:pPr algn="ctr">
               <a:lnSpc>
-                <a:spcPct val="110000"/>
+                <a:spcPct val="150000"/>
               </a:lnSpc>
             </a:pPr>
             <a:r>
-              <a:rPr sz="1600" b="1">
-                <a:solidFill>
-                  <a:srgbClr val="1C2A33"/>
-                </a:solidFill>
-                <a:latin typeface="微软雅黑"/>
-                <a:ea typeface="微软雅黑"/>
-                <a:cs typeface="微软雅黑"/>
-              </a:rPr>
-              <a:t>目标</a:t>
-            </a:r>
-          </a:p>
-        </p:txBody>
-      </p:sp>
-      <p:sp>
-        <p:nvSpPr>
-          <p:cNvPr id="9" name="TextBox 8"/>
-          <p:cNvSpPr txBox="1"/>
-          <p:nvPr/>
-        </p:nvSpPr>
-        <p:spPr>
-          <a:xfrm>
-            <a:off x="1371600" y="1965960"/>
-            <a:ext cx="4434840" cy="1417320"/>
-          </a:xfrm>
-          <a:prstGeom prst="rect">
-            <a:avLst/>
-          </a:prstGeom>
-          <a:noFill/>
-        </p:spPr>
-        <p:txBody>
-          <a:bodyPr wrap="square" anchor="t" lIns="0" rIns="0" tIns="0" bIns="0">
-            <a:spAutoFit/>
-          </a:bodyPr>
-          <a:lstStyle/>
-          <a:p>
-            <a:pPr algn="l">
-              <a:lnSpc>
-                <a:spcPct val="128000"/>
-              </a:lnSpc>
-            </a:pPr>
-            <a:r>
-              <a:rPr sz="1400" b="0">
+              <a:rPr sz="1350" b="0">
                 <a:solidFill>
                   <a:srgbClr val="1C2A33"/>
                 </a:solidFill>
@@ -3785,8 +3800,8 @@
         </p:nvSpPr>
         <p:spPr>
           <a:xfrm>
-            <a:off x="6263640" y="1417320"/>
-            <a:ext cx="5349240" cy="2057400"/>
+            <a:off x="3459403" y="2194560"/>
+            <a:ext cx="2453563" cy="3840480"/>
           </a:xfrm>
           <a:prstGeom prst="roundRect">
             <a:avLst/>
@@ -3794,9 +3809,9 @@
           <a:solidFill>
             <a:srgbClr val="FFFFFF"/>
           </a:solidFill>
-          <a:ln w="22860">
+          <a:ln w="20320">
             <a:solidFill>
-              <a:srgbClr val="B23A2A"/>
+              <a:srgbClr val="2E7D6B"/>
             </a:solidFill>
           </a:ln>
           <a:effectLst/>
@@ -3831,14 +3846,14 @@
         </p:nvSpPr>
         <p:spPr>
           <a:xfrm>
-            <a:off x="6428232" y="1581912"/>
-            <a:ext cx="457200" cy="457200"/>
+            <a:off x="4320425" y="2468880"/>
+            <a:ext cx="731520" cy="731520"/>
           </a:xfrm>
           <a:prstGeom prst="ellipse">
             <a:avLst/>
           </a:prstGeom>
           <a:solidFill>
-            <a:srgbClr val="B23A2A"/>
+            <a:srgbClr val="2E7D6B"/>
           </a:solidFill>
           <a:ln>
             <a:noFill/>
@@ -3875,8 +3890,8 @@
         </p:nvSpPr>
         <p:spPr>
           <a:xfrm>
-            <a:off x="6428232" y="1636776"/>
-            <a:ext cx="457200" cy="384048"/>
+            <a:off x="4320425" y="2578608"/>
+            <a:ext cx="731520" cy="457200"/>
           </a:xfrm>
           <a:prstGeom prst="rect">
             <a:avLst/>
@@ -3889,9 +3904,13 @@
           </a:bodyPr>
           <a:lstStyle/>
           <a:p>
-            <a:pPr algn="ctr"/>
-            <a:r>
-              <a:rPr sz="1600" b="1">
+            <a:pPr algn="ctr">
+              <a:lnSpc>
+                <a:spcPct val="120000"/>
+              </a:lnSpc>
+            </a:pPr>
+            <a:r>
+              <a:rPr sz="2200" b="1">
                 <a:solidFill>
                   <a:srgbClr val="FFFFFF"/>
                 </a:solidFill>
@@ -3912,8 +3931,8 @@
         </p:nvSpPr>
         <p:spPr>
           <a:xfrm>
-            <a:off x="6995160" y="1527048"/>
-            <a:ext cx="4434840" cy="457200"/>
+            <a:off x="3642283" y="3429000"/>
+            <a:ext cx="2087803" cy="2377440"/>
           </a:xfrm>
           <a:prstGeom prst="rect">
             <a:avLst/>
@@ -3926,54 +3945,13 @@
           </a:bodyPr>
           <a:lstStyle/>
           <a:p>
-            <a:pPr algn="l">
+            <a:pPr algn="ctr">
               <a:lnSpc>
-                <a:spcPct val="110000"/>
+                <a:spcPct val="150000"/>
               </a:lnSpc>
             </a:pPr>
             <a:r>
-              <a:rPr sz="1600" b="1">
-                <a:solidFill>
-                  <a:srgbClr val="1C2A33"/>
-                </a:solidFill>
-                <a:latin typeface="微软雅黑"/>
-                <a:ea typeface="微软雅黑"/>
-                <a:cs typeface="微软雅黑"/>
-              </a:rPr>
-              <a:t>目标</a:t>
-            </a:r>
-          </a:p>
-        </p:txBody>
-      </p:sp>
-      <p:sp>
-        <p:nvSpPr>
-          <p:cNvPr id="14" name="TextBox 13"/>
-          <p:cNvSpPr txBox="1"/>
-          <p:nvPr/>
-        </p:nvSpPr>
-        <p:spPr>
-          <a:xfrm>
-            <a:off x="6995160" y="1965960"/>
-            <a:ext cx="4434840" cy="1417320"/>
-          </a:xfrm>
-          <a:prstGeom prst="rect">
-            <a:avLst/>
-          </a:prstGeom>
-          <a:noFill/>
-        </p:spPr>
-        <p:txBody>
-          <a:bodyPr wrap="square" anchor="t" lIns="0" rIns="0" tIns="0" bIns="0">
-            <a:spAutoFit/>
-          </a:bodyPr>
-          <a:lstStyle/>
-          <a:p>
-            <a:pPr algn="l">
-              <a:lnSpc>
-                <a:spcPct val="128000"/>
-              </a:lnSpc>
-            </a:pPr>
-            <a:r>
-              <a:rPr sz="1400" b="0">
+              <a:rPr sz="1350" b="0">
                 <a:solidFill>
                   <a:srgbClr val="1C2A33"/>
                 </a:solidFill>
@@ -3988,14 +3966,14 @@
       </p:sp>
       <p:sp>
         <p:nvSpPr>
-          <p:cNvPr id="15" name="Rounded Rectangle 14"/>
+          <p:cNvPr id="14" name="Rounded Rectangle 13"/>
           <p:cNvSpPr/>
           <p:nvPr/>
         </p:nvSpPr>
         <p:spPr>
           <a:xfrm>
-            <a:off x="640080" y="3703320"/>
-            <a:ext cx="5349240" cy="2057400"/>
+            <a:off x="6278727" y="2194560"/>
+            <a:ext cx="2453563" cy="3840480"/>
           </a:xfrm>
           <a:prstGeom prst="roundRect">
             <a:avLst/>
@@ -4003,9 +3981,9 @@
           <a:solidFill>
             <a:srgbClr val="FFFFFF"/>
           </a:solidFill>
-          <a:ln w="22860">
+          <a:ln w="20320">
             <a:solidFill>
-              <a:srgbClr val="B23A2A"/>
+              <a:srgbClr val="C8A86B"/>
             </a:solidFill>
           </a:ln>
           <a:effectLst/>
@@ -4034,20 +4012,20 @@
       </p:sp>
       <p:sp>
         <p:nvSpPr>
-          <p:cNvPr id="16" name="Oval 15"/>
+          <p:cNvPr id="15" name="Oval 14"/>
           <p:cNvSpPr/>
           <p:nvPr/>
         </p:nvSpPr>
         <p:spPr>
           <a:xfrm>
-            <a:off x="804672" y="3867912"/>
-            <a:ext cx="457200" cy="457200"/>
+            <a:off x="7139749" y="2468880"/>
+            <a:ext cx="731520" cy="731520"/>
           </a:xfrm>
           <a:prstGeom prst="ellipse">
             <a:avLst/>
           </a:prstGeom>
           <a:solidFill>
-            <a:srgbClr val="B23A2A"/>
+            <a:srgbClr val="C8A86B"/>
           </a:solidFill>
           <a:ln>
             <a:noFill/>
@@ -4078,14 +4056,14 @@
       </p:sp>
       <p:sp>
         <p:nvSpPr>
-          <p:cNvPr id="17" name="TextBox 16"/>
+          <p:cNvPr id="16" name="TextBox 15"/>
           <p:cNvSpPr txBox="1"/>
           <p:nvPr/>
         </p:nvSpPr>
         <p:spPr>
           <a:xfrm>
-            <a:off x="804672" y="3922776"/>
-            <a:ext cx="457200" cy="384048"/>
+            <a:off x="7139749" y="2578608"/>
+            <a:ext cx="731520" cy="457200"/>
           </a:xfrm>
           <a:prstGeom prst="rect">
             <a:avLst/>
@@ -4098,9 +4076,13 @@
           </a:bodyPr>
           <a:lstStyle/>
           <a:p>
-            <a:pPr algn="ctr"/>
-            <a:r>
-              <a:rPr sz="1600" b="1">
+            <a:pPr algn="ctr">
+              <a:lnSpc>
+                <a:spcPct val="120000"/>
+              </a:lnSpc>
+            </a:pPr>
+            <a:r>
+              <a:rPr sz="2200" b="1">
                 <a:solidFill>
                   <a:srgbClr val="FFFFFF"/>
                 </a:solidFill>
@@ -4115,14 +4097,14 @@
       </p:sp>
       <p:sp>
         <p:nvSpPr>
-          <p:cNvPr id="18" name="TextBox 17"/>
+          <p:cNvPr id="17" name="TextBox 16"/>
           <p:cNvSpPr txBox="1"/>
           <p:nvPr/>
         </p:nvSpPr>
         <p:spPr>
           <a:xfrm>
-            <a:off x="1371600" y="3813048"/>
-            <a:ext cx="4434840" cy="457200"/>
+            <a:off x="6461607" y="3429000"/>
+            <a:ext cx="2087803" cy="2377440"/>
           </a:xfrm>
           <a:prstGeom prst="rect">
             <a:avLst/>
@@ -4135,54 +4117,13 @@
           </a:bodyPr>
           <a:lstStyle/>
           <a:p>
-            <a:pPr algn="l">
+            <a:pPr algn="ctr">
               <a:lnSpc>
-                <a:spcPct val="110000"/>
+                <a:spcPct val="150000"/>
               </a:lnSpc>
             </a:pPr>
             <a:r>
-              <a:rPr sz="1600" b="1">
-                <a:solidFill>
-                  <a:srgbClr val="1C2A33"/>
-                </a:solidFill>
-                <a:latin typeface="微软雅黑"/>
-                <a:ea typeface="微软雅黑"/>
-                <a:cs typeface="微软雅黑"/>
-              </a:rPr>
-              <a:t>目标</a:t>
-            </a:r>
-          </a:p>
-        </p:txBody>
-      </p:sp>
-      <p:sp>
-        <p:nvSpPr>
-          <p:cNvPr id="19" name="TextBox 18"/>
-          <p:cNvSpPr txBox="1"/>
-          <p:nvPr/>
-        </p:nvSpPr>
-        <p:spPr>
-          <a:xfrm>
-            <a:off x="1371600" y="4251960"/>
-            <a:ext cx="4434840" cy="1417320"/>
-          </a:xfrm>
-          <a:prstGeom prst="rect">
-            <a:avLst/>
-          </a:prstGeom>
-          <a:noFill/>
-        </p:spPr>
-        <p:txBody>
-          <a:bodyPr wrap="square" anchor="t" lIns="0" rIns="0" tIns="0" bIns="0">
-            <a:spAutoFit/>
-          </a:bodyPr>
-          <a:lstStyle/>
-          <a:p>
-            <a:pPr algn="l">
-              <a:lnSpc>
-                <a:spcPct val="128000"/>
-              </a:lnSpc>
-            </a:pPr>
-            <a:r>
-              <a:rPr sz="1400" b="0">
+              <a:rPr sz="1350" b="0">
                 <a:solidFill>
                   <a:srgbClr val="1C2A33"/>
                 </a:solidFill>
@@ -4197,14 +4138,14 @@
       </p:sp>
       <p:sp>
         <p:nvSpPr>
-          <p:cNvPr id="20" name="Rounded Rectangle 19"/>
+          <p:cNvPr id="18" name="Rounded Rectangle 17"/>
           <p:cNvSpPr/>
           <p:nvPr/>
         </p:nvSpPr>
         <p:spPr>
           <a:xfrm>
-            <a:off x="6263640" y="3703320"/>
-            <a:ext cx="5349240" cy="2057400"/>
+            <a:off x="9098051" y="2194560"/>
+            <a:ext cx="2453563" cy="3840480"/>
           </a:xfrm>
           <a:prstGeom prst="roundRect">
             <a:avLst/>
@@ -4212,9 +4153,9 @@
           <a:solidFill>
             <a:srgbClr val="FFFFFF"/>
           </a:solidFill>
-          <a:ln w="22860">
+          <a:ln w="20320">
             <a:solidFill>
-              <a:srgbClr val="B23A2A"/>
+              <a:srgbClr val="6B6258"/>
             </a:solidFill>
           </a:ln>
           <a:effectLst/>
@@ -4243,20 +4184,20 @@
       </p:sp>
       <p:sp>
         <p:nvSpPr>
-          <p:cNvPr id="21" name="Oval 20"/>
+          <p:cNvPr id="19" name="Oval 18"/>
           <p:cNvSpPr/>
           <p:nvPr/>
         </p:nvSpPr>
         <p:spPr>
           <a:xfrm>
-            <a:off x="6428232" y="3867912"/>
-            <a:ext cx="457200" cy="457200"/>
+            <a:off x="9959073" y="2468880"/>
+            <a:ext cx="731520" cy="731520"/>
           </a:xfrm>
           <a:prstGeom prst="ellipse">
             <a:avLst/>
           </a:prstGeom>
           <a:solidFill>
-            <a:srgbClr val="B23A2A"/>
+            <a:srgbClr val="6B6258"/>
           </a:solidFill>
           <a:ln>
             <a:noFill/>
@@ -4287,14 +4228,14 @@
       </p:sp>
       <p:sp>
         <p:nvSpPr>
-          <p:cNvPr id="22" name="TextBox 21"/>
+          <p:cNvPr id="20" name="TextBox 19"/>
           <p:cNvSpPr txBox="1"/>
           <p:nvPr/>
         </p:nvSpPr>
         <p:spPr>
           <a:xfrm>
-            <a:off x="6428232" y="3922776"/>
-            <a:ext cx="457200" cy="384048"/>
+            <a:off x="9959073" y="2578608"/>
+            <a:ext cx="731520" cy="457200"/>
           </a:xfrm>
           <a:prstGeom prst="rect">
             <a:avLst/>
@@ -4307,9 +4248,13 @@
           </a:bodyPr>
           <a:lstStyle/>
           <a:p>
-            <a:pPr algn="ctr"/>
-            <a:r>
-              <a:rPr sz="1600" b="1">
+            <a:pPr algn="ctr">
+              <a:lnSpc>
+                <a:spcPct val="120000"/>
+              </a:lnSpc>
+            </a:pPr>
+            <a:r>
+              <a:rPr sz="2200" b="1">
                 <a:solidFill>
                   <a:srgbClr val="FFFFFF"/>
                 </a:solidFill>
@@ -4324,14 +4269,14 @@
       </p:sp>
       <p:sp>
         <p:nvSpPr>
-          <p:cNvPr id="23" name="TextBox 22"/>
+          <p:cNvPr id="21" name="TextBox 20"/>
           <p:cNvSpPr txBox="1"/>
           <p:nvPr/>
         </p:nvSpPr>
         <p:spPr>
           <a:xfrm>
-            <a:off x="6995160" y="3813048"/>
-            <a:ext cx="4434840" cy="457200"/>
+            <a:off x="9280931" y="3429000"/>
+            <a:ext cx="2087803" cy="2377440"/>
           </a:xfrm>
           <a:prstGeom prst="rect">
             <a:avLst/>
@@ -4344,54 +4289,13 @@
           </a:bodyPr>
           <a:lstStyle/>
           <a:p>
-            <a:pPr algn="l">
+            <a:pPr algn="ctr">
               <a:lnSpc>
-                <a:spcPct val="110000"/>
+                <a:spcPct val="150000"/>
               </a:lnSpc>
             </a:pPr>
             <a:r>
-              <a:rPr sz="1600" b="1">
-                <a:solidFill>
-                  <a:srgbClr val="1C2A33"/>
-                </a:solidFill>
-                <a:latin typeface="微软雅黑"/>
-                <a:ea typeface="微软雅黑"/>
-                <a:cs typeface="微软雅黑"/>
-              </a:rPr>
-              <a:t>目标</a:t>
-            </a:r>
-          </a:p>
-        </p:txBody>
-      </p:sp>
-      <p:sp>
-        <p:nvSpPr>
-          <p:cNvPr id="24" name="TextBox 23"/>
-          <p:cNvSpPr txBox="1"/>
-          <p:nvPr/>
-        </p:nvSpPr>
-        <p:spPr>
-          <a:xfrm>
-            <a:off x="6995160" y="4251960"/>
-            <a:ext cx="4434840" cy="1417320"/>
-          </a:xfrm>
-          <a:prstGeom prst="rect">
-            <a:avLst/>
-          </a:prstGeom>
-          <a:noFill/>
-        </p:spPr>
-        <p:txBody>
-          <a:bodyPr wrap="square" anchor="t" lIns="0" rIns="0" tIns="0" bIns="0">
-            <a:spAutoFit/>
-          </a:bodyPr>
-          <a:lstStyle/>
-          <a:p>
-            <a:pPr algn="l">
-              <a:lnSpc>
-                <a:spcPct val="128000"/>
-              </a:lnSpc>
-            </a:pPr>
-            <a:r>
-              <a:rPr sz="1400" b="0">
+              <a:rPr sz="1350" b="0">
                 <a:solidFill>
                   <a:srgbClr val="1C2A33"/>
                 </a:solidFill>
@@ -4406,7 +4310,7 @@
       </p:sp>
       <p:sp>
         <p:nvSpPr>
-          <p:cNvPr id="25" name="TextBox 24"/>
+          <p:cNvPr id="22" name="TextBox 21"/>
           <p:cNvSpPr txBox="1"/>
           <p:nvPr/>
         </p:nvSpPr>
@@ -4533,13 +4437,13 @@
             <a:r>
               <a:rPr sz="1300" b="1">
                 <a:solidFill>
-                  <a:srgbClr val="2E7D6B"/>
+                  <a:srgbClr val="B23A2A"/>
                 </a:solidFill>
                 <a:latin typeface="微软雅黑"/>
                 <a:ea typeface="微软雅黑"/>
                 <a:cs typeface="微软雅黑"/>
               </a:rPr>
-              <a:t>课文背景</a:t>
+              <a:t>背景与权威调研</a:t>
             </a:r>
           </a:p>
         </p:txBody>
@@ -4559,7 +4463,7 @@
             <a:avLst/>
           </a:prstGeom>
           <a:solidFill>
-            <a:srgbClr val="2E7D6B"/>
+            <a:srgbClr val="B23A2A"/>
           </a:solidFill>
           <a:ln>
             <a:noFill/>
@@ -4596,8 +4500,8 @@
         </p:nvSpPr>
         <p:spPr>
           <a:xfrm>
-            <a:off x="640080" y="1508760"/>
-            <a:ext cx="6766560" cy="4572000"/>
+            <a:off x="640080" y="1737360"/>
+            <a:ext cx="5227167" cy="457200"/>
           </a:xfrm>
           <a:prstGeom prst="rect">
             <a:avLst/>
@@ -4612,14 +4516,55 @@
           <a:p>
             <a:pPr algn="l">
               <a:lnSpc>
-                <a:spcPct val="150000"/>
+                <a:spcPct val="130000"/>
+              </a:lnSpc>
+            </a:pPr>
+            <a:r>
+              <a:rPr sz="1800" b="1">
+                <a:solidFill>
+                  <a:srgbClr val="B23A2A"/>
+                </a:solidFill>
+                <a:latin typeface="楷体"/>
+                <a:ea typeface="楷体"/>
+                <a:cs typeface="楷体"/>
+              </a:rPr>
+              <a:t>教材定位与权威核实</a:t>
+            </a:r>
+          </a:p>
+        </p:txBody>
+      </p:sp>
+      <p:sp>
+        <p:nvSpPr>
+          <p:cNvPr id="6" name="TextBox 5"/>
+          <p:cNvSpPr txBox="1"/>
+          <p:nvPr/>
+        </p:nvSpPr>
+        <p:spPr>
+          <a:xfrm>
+            <a:off x="640080" y="2286000"/>
+            <a:ext cx="5227167" cy="4206240"/>
+          </a:xfrm>
+          <a:prstGeom prst="rect">
+            <a:avLst/>
+          </a:prstGeom>
+          <a:noFill/>
+        </p:spPr>
+        <p:txBody>
+          <a:bodyPr wrap="square" anchor="t" lIns="0" rIns="0" tIns="0" bIns="0">
+            <a:spAutoFit/>
+          </a:bodyPr>
+          <a:lstStyle/>
+          <a:p>
+            <a:pPr algn="l">
+              <a:lnSpc>
+                <a:spcPct val="155000"/>
               </a:lnSpc>
               <a:spcAft>
-                <a:spcPts val="600"/>
+                <a:spcPts val="800"/>
               </a:spcAft>
             </a:pPr>
             <a:r>
-              <a:rPr sz="1600" b="0">
+              <a:rPr sz="1450" b="0">
                 <a:solidFill>
                   <a:srgbClr val="1C2A33"/>
                 </a:solidFill>
@@ -4630,43 +4575,80 @@
               <a:t>稳态：正常机体通过调节作用，使内环境的理化性质（渗透压、pH、温度等）保持相对稳定的状态。稳态依赖神经-体液-免疫调节网络，是机体进行正常生命活动的必要条件。</a:t>
             </a:r>
           </a:p>
-        </p:txBody>
-      </p:sp>
-      <p:pic>
-        <p:nvPicPr>
-          <p:cNvPr id="6" name="Picture 5" descr="ricefield.jpg"/>
-          <p:cNvPicPr>
-            <a:picLocks noChangeAspect="1"/>
-          </p:cNvPicPr>
-          <p:nvPr/>
-        </p:nvPicPr>
-        <p:blipFill>
-          <a:blip r:embed="rId2"/>
-          <a:srcRect l="23066" r="23066"/>
-          <a:stretch>
-            <a:fillRect/>
-          </a:stretch>
-        </p:blipFill>
-        <p:spPr>
-          <a:xfrm>
-            <a:off x="8046720" y="1508760"/>
-            <a:ext cx="4114800" cy="3108960"/>
-          </a:xfrm>
-          <a:prstGeom prst="rect">
-            <a:avLst/>
-          </a:prstGeom>
-        </p:spPr>
-      </p:pic>
-      <p:sp>
-        <p:nvSpPr>
-          <p:cNvPr id="7" name="TextBox 6"/>
+          <a:p>
+            <a:pPr algn="l">
+              <a:lnSpc>
+                <a:spcPct val="150000"/>
+              </a:lnSpc>
+            </a:pPr>
+            <a:r>
+              <a:rPr sz="1300" b="0">
+                <a:solidFill>
+                  <a:srgbClr val="6B6258"/>
+                </a:solidFill>
+                <a:latin typeface="楷体"/>
+                <a:ea typeface="楷体"/>
+                <a:cs typeface="楷体"/>
+              </a:rPr>
+              <a:t>本课属于《选择性必修1 稳态与调节》人体的内环境与稳态单元，沿"基因→性状→变异→进化→稳态"主线展开。</a:t>
+            </a:r>
+          </a:p>
+        </p:txBody>
+      </p:sp>
+      <p:sp>
+        <p:nvSpPr>
+          <p:cNvPr id="7" name="Rectangle 6"/>
+          <p:cNvSpPr/>
+          <p:nvPr/>
+        </p:nvSpPr>
+        <p:spPr>
+          <a:xfrm>
+            <a:off x="6324447" y="1737360"/>
+            <a:ext cx="5227167" cy="4663440"/>
+          </a:xfrm>
+          <a:prstGeom prst="rect">
+            <a:avLst/>
+          </a:prstGeom>
+          <a:solidFill>
+            <a:srgbClr val="1C2A33"/>
+          </a:solidFill>
+          <a:ln>
+            <a:noFill/>
+          </a:ln>
+          <a:effectLst/>
+        </p:spPr>
+        <p:style>
+          <a:lnRef idx="1">
+            <a:schemeClr val="accent1"/>
+          </a:lnRef>
+          <a:fillRef idx="3">
+            <a:schemeClr val="accent1"/>
+          </a:fillRef>
+          <a:effectRef idx="2">
+            <a:schemeClr val="accent1"/>
+          </a:effectRef>
+          <a:fontRef idx="minor">
+            <a:schemeClr val="lt1"/>
+          </a:fontRef>
+        </p:style>
+        <p:txBody>
+          <a:bodyPr rtlCol="0" anchor="ctr"/>
+          <a:lstStyle/>
+          <a:p>
+            <a:pPr algn="ctr"/>
+          </a:p>
+        </p:txBody>
+      </p:sp>
+      <p:sp>
+        <p:nvSpPr>
+          <p:cNvPr id="8" name="TextBox 7"/>
           <p:cNvSpPr txBox="1"/>
           <p:nvPr/>
         </p:nvSpPr>
         <p:spPr>
           <a:xfrm>
-            <a:off x="8046720" y="4663440"/>
-            <a:ext cx="4114800" cy="365760"/>
+            <a:off x="6598767" y="1920240"/>
+            <a:ext cx="4678527" cy="457200"/>
           </a:xfrm>
           <a:prstGeom prst="rect">
             <a:avLst/>
@@ -4679,24 +4661,130 @@
           </a:bodyPr>
           <a:lstStyle/>
           <a:p>
-            <a:pPr algn="ctr"/>
-            <a:r>
-              <a:rPr sz="1100" b="0">
-                <a:solidFill>
-                  <a:srgbClr val="6B6258"/>
+            <a:pPr algn="l">
+              <a:lnSpc>
+                <a:spcPct val="130000"/>
+              </a:lnSpc>
+            </a:pPr>
+            <a:r>
+              <a:rPr sz="1600" b="1">
+                <a:solidFill>
+                  <a:srgbClr val="C8A86B"/>
+                </a:solidFill>
+                <a:latin typeface="楷体"/>
+                <a:ea typeface="楷体"/>
+                <a:cs typeface="楷体"/>
+              </a:rPr>
+              <a:t>权威调研来源（联网核实）</a:t>
+            </a:r>
+          </a:p>
+        </p:txBody>
+      </p:sp>
+      <p:sp>
+        <p:nvSpPr>
+          <p:cNvPr id="9" name="TextBox 8"/>
+          <p:cNvSpPr txBox="1"/>
+          <p:nvPr/>
+        </p:nvSpPr>
+        <p:spPr>
+          <a:xfrm>
+            <a:off x="6598767" y="2468880"/>
+            <a:ext cx="4678527" cy="3657600"/>
+          </a:xfrm>
+          <a:prstGeom prst="rect">
+            <a:avLst/>
+          </a:prstGeom>
+          <a:noFill/>
+        </p:spPr>
+        <p:txBody>
+          <a:bodyPr wrap="square" anchor="t" lIns="0" rIns="0" tIns="0" bIns="0">
+            <a:spAutoFit/>
+          </a:bodyPr>
+          <a:lstStyle/>
+          <a:p>
+            <a:pPr algn="l">
+              <a:lnSpc>
+                <a:spcPct val="145000"/>
+              </a:lnSpc>
+              <a:spcAft>
+                <a:spcPts val="700"/>
+              </a:spcAft>
+            </a:pPr>
+            <a:r>
+              <a:rPr sz="1250" b="0">
+                <a:solidFill>
+                  <a:srgbClr val="FFFFFF"/>
                 </a:solidFill>
                 <a:latin typeface="微软雅黑"/>
                 <a:ea typeface="微软雅黑"/>
                 <a:cs typeface="微软雅黑"/>
               </a:rPr>
-              <a:t>资料图（自由授权，复用 ricefield.jpg）</a:t>
-            </a:r>
-          </a:p>
-        </p:txBody>
-      </p:sp>
-      <p:sp>
-        <p:nvSpPr>
-          <p:cNvPr id="8" name="TextBox 7"/>
+              <a:t>· yixue.com: 内环境稳态（Walter Cannon 1926 提出 homeostasis）。</a:t>
+            </a:r>
+          </a:p>
+          <a:p>
+            <a:pPr algn="l">
+              <a:lnSpc>
+                <a:spcPct val="145000"/>
+              </a:lnSpc>
+              <a:spcAft>
+                <a:spcPts val="700"/>
+              </a:spcAft>
+            </a:pPr>
+            <a:r>
+              <a:rPr sz="1250" b="0">
+                <a:solidFill>
+                  <a:srgbClr val="FFFFFF"/>
+                </a:solidFill>
+                <a:latin typeface="微软雅黑"/>
+                <a:ea typeface="微软雅黑"/>
+                <a:cs typeface="微软雅黑"/>
+              </a:rPr>
+              <a:t>· Billman GE. Homeostasis. Front Physiol 2020（Bernard→Cannon 负反馈调节）。</a:t>
+            </a:r>
+          </a:p>
+        </p:txBody>
+      </p:sp>
+      <p:sp>
+        <p:nvSpPr>
+          <p:cNvPr id="10" name="TextBox 9"/>
+          <p:cNvSpPr txBox="1"/>
+          <p:nvPr/>
+        </p:nvSpPr>
+        <p:spPr>
+          <a:xfrm>
+            <a:off x="640080" y="6355080"/>
+            <a:ext cx="5227167" cy="365760"/>
+          </a:xfrm>
+          <a:prstGeom prst="rect">
+            <a:avLst/>
+          </a:prstGeom>
+          <a:noFill/>
+        </p:spPr>
+        <p:txBody>
+          <a:bodyPr wrap="square" anchor="t" lIns="0" rIns="0" tIns="0" bIns="0">
+            <a:spAutoFit/>
+          </a:bodyPr>
+          <a:lstStyle/>
+          <a:p>
+            <a:pPr algn="ctr"/>
+            <a:r>
+              <a:rPr sz="1100" b="0">
+                <a:solidFill>
+                  <a:srgbClr val="6B6258"/>
+                </a:solidFill>
+                <a:latin typeface="微软雅黑"/>
+                <a:ea typeface="微软雅黑"/>
+                <a:cs typeface="微软雅黑"/>
+              </a:rPr>
+              <a:t>本课件未使用无关配图，以学科色块呈现</a:t>
+            </a:r>
+          </a:p>
+        </p:txBody>
+      </p:sp>
+      <p:sp>
+        <p:nvSpPr>
+          <p:cNvPr id="11" name="TextBox 10"/>
           <p:cNvSpPr txBox="1"/>
           <p:nvPr/>
         </p:nvSpPr>
@@ -4829,7 +4917,7 @@
                 <a:ea typeface="微软雅黑"/>
                 <a:cs typeface="微软雅黑"/>
               </a:rPr>
-              <a:t>学习重点</a:t>
+              <a:t>重点</a:t>
             </a:r>
           </a:p>
         </p:txBody>
@@ -4880,14 +4968,55 @@
       </p:sp>
       <p:sp>
         <p:nvSpPr>
-          <p:cNvPr id="5" name="Rounded Rectangle 4"/>
+          <p:cNvPr id="5" name="TextBox 4"/>
+          <p:cNvSpPr txBox="1"/>
+          <p:nvPr/>
+        </p:nvSpPr>
+        <p:spPr>
+          <a:xfrm>
+            <a:off x="640080" y="1325880"/>
+            <a:ext cx="10911535" cy="548640"/>
+          </a:xfrm>
+          <a:prstGeom prst="rect">
+            <a:avLst/>
+          </a:prstGeom>
+          <a:noFill/>
+        </p:spPr>
+        <p:txBody>
+          <a:bodyPr wrap="square" anchor="t" lIns="0" rIns="0" tIns="0" bIns="0">
+            <a:spAutoFit/>
+          </a:bodyPr>
+          <a:lstStyle/>
+          <a:p>
+            <a:pPr algn="l">
+              <a:lnSpc>
+                <a:spcPct val="130000"/>
+              </a:lnSpc>
+            </a:pPr>
+            <a:r>
+              <a:rPr sz="2800" b="1">
+                <a:solidFill>
+                  <a:srgbClr val="1C2A33"/>
+                </a:solidFill>
+                <a:latin typeface="楷体"/>
+                <a:ea typeface="楷体"/>
+                <a:cs typeface="楷体"/>
+              </a:rPr>
+              <a:t>本课核心要点</a:t>
+            </a:r>
+          </a:p>
+        </p:txBody>
+      </p:sp>
+      <p:sp>
+        <p:nvSpPr>
+          <p:cNvPr id="6" name="Rounded Rectangle 5"/>
           <p:cNvSpPr/>
           <p:nvPr/>
         </p:nvSpPr>
         <p:spPr>
           <a:xfrm>
-            <a:off x="640080" y="1371600"/>
-            <a:ext cx="10911535" cy="1170432"/>
+            <a:off x="640080" y="2011680"/>
+            <a:ext cx="10911535" cy="928116"/>
           </a:xfrm>
           <a:prstGeom prst="roundRect">
             <a:avLst/>
@@ -4895,7 +5024,439 @@
           <a:solidFill>
             <a:srgbClr val="FFFFFF"/>
           </a:solidFill>
-          <a:ln w="22860">
+          <a:ln w="17780">
+            <a:solidFill>
+              <a:srgbClr val="B23A2A"/>
+            </a:solidFill>
+          </a:ln>
+          <a:effectLst/>
+        </p:spPr>
+        <p:style>
+          <a:lnRef idx="1">
+            <a:schemeClr val="accent1"/>
+          </a:lnRef>
+          <a:fillRef idx="3">
+            <a:schemeClr val="accent1"/>
+          </a:fillRef>
+          <a:effectRef idx="2">
+            <a:schemeClr val="accent1"/>
+          </a:effectRef>
+          <a:fontRef idx="minor">
+            <a:schemeClr val="lt1"/>
+          </a:fontRef>
+        </p:style>
+        <p:txBody>
+          <a:bodyPr rtlCol="0" anchor="ctr"/>
+          <a:lstStyle/>
+          <a:p>
+            <a:pPr algn="ctr"/>
+          </a:p>
+        </p:txBody>
+      </p:sp>
+      <p:sp>
+        <p:nvSpPr>
+          <p:cNvPr id="7" name="Rectangle 6"/>
+          <p:cNvSpPr/>
+          <p:nvPr/>
+        </p:nvSpPr>
+        <p:spPr>
+          <a:xfrm>
+            <a:off x="640080" y="2011680"/>
+            <a:ext cx="109728" cy="928116"/>
+          </a:xfrm>
+          <a:prstGeom prst="rect">
+            <a:avLst/>
+          </a:prstGeom>
+          <a:solidFill>
+            <a:srgbClr val="B23A2A"/>
+          </a:solidFill>
+          <a:ln>
+            <a:noFill/>
+          </a:ln>
+          <a:effectLst/>
+        </p:spPr>
+        <p:style>
+          <a:lnRef idx="1">
+            <a:schemeClr val="accent1"/>
+          </a:lnRef>
+          <a:fillRef idx="3">
+            <a:schemeClr val="accent1"/>
+          </a:fillRef>
+          <a:effectRef idx="2">
+            <a:schemeClr val="accent1"/>
+          </a:effectRef>
+          <a:fontRef idx="minor">
+            <a:schemeClr val="lt1"/>
+          </a:fontRef>
+        </p:style>
+        <p:txBody>
+          <a:bodyPr rtlCol="0" anchor="ctr"/>
+          <a:lstStyle/>
+          <a:p>
+            <a:pPr algn="ctr"/>
+          </a:p>
+        </p:txBody>
+      </p:sp>
+      <p:sp>
+        <p:nvSpPr>
+          <p:cNvPr id="8" name="Oval 7"/>
+          <p:cNvSpPr/>
+          <p:nvPr/>
+        </p:nvSpPr>
+        <p:spPr>
+          <a:xfrm>
+            <a:off x="914400" y="2183130"/>
+            <a:ext cx="585216" cy="585216"/>
+          </a:xfrm>
+          <a:prstGeom prst="ellipse">
+            <a:avLst/>
+          </a:prstGeom>
+          <a:solidFill>
+            <a:srgbClr val="B23A2A"/>
+          </a:solidFill>
+          <a:ln>
+            <a:noFill/>
+          </a:ln>
+          <a:effectLst/>
+        </p:spPr>
+        <p:style>
+          <a:lnRef idx="1">
+            <a:schemeClr val="accent1"/>
+          </a:lnRef>
+          <a:fillRef idx="3">
+            <a:schemeClr val="accent1"/>
+          </a:fillRef>
+          <a:effectRef idx="2">
+            <a:schemeClr val="accent1"/>
+          </a:effectRef>
+          <a:fontRef idx="minor">
+            <a:schemeClr val="lt1"/>
+          </a:fontRef>
+        </p:style>
+        <p:txBody>
+          <a:bodyPr rtlCol="0" anchor="ctr"/>
+          <a:lstStyle/>
+          <a:p>
+            <a:pPr algn="ctr"/>
+          </a:p>
+        </p:txBody>
+      </p:sp>
+      <p:sp>
+        <p:nvSpPr>
+          <p:cNvPr id="9" name="TextBox 8"/>
+          <p:cNvSpPr txBox="1"/>
+          <p:nvPr/>
+        </p:nvSpPr>
+        <p:spPr>
+          <a:xfrm>
+            <a:off x="914400" y="2274570"/>
+            <a:ext cx="585216" cy="384048"/>
+          </a:xfrm>
+          <a:prstGeom prst="rect">
+            <a:avLst/>
+          </a:prstGeom>
+          <a:noFill/>
+        </p:spPr>
+        <p:txBody>
+          <a:bodyPr wrap="square" anchor="t" lIns="0" rIns="0" tIns="0" bIns="0">
+            <a:spAutoFit/>
+          </a:bodyPr>
+          <a:lstStyle/>
+          <a:p>
+            <a:pPr algn="ctr">
+              <a:lnSpc>
+                <a:spcPct val="120000"/>
+              </a:lnSpc>
+            </a:pPr>
+            <a:r>
+              <a:rPr sz="1800" b="1">
+                <a:solidFill>
+                  <a:srgbClr val="FFFFFF"/>
+                </a:solidFill>
+                <a:latin typeface="微软雅黑"/>
+                <a:ea typeface="微软雅黑"/>
+                <a:cs typeface="微软雅黑"/>
+              </a:rPr>
+              <a:t>1</a:t>
+            </a:r>
+          </a:p>
+        </p:txBody>
+      </p:sp>
+      <p:sp>
+        <p:nvSpPr>
+          <p:cNvPr id="10" name="TextBox 9"/>
+          <p:cNvSpPr txBox="1"/>
+          <p:nvPr/>
+        </p:nvSpPr>
+        <p:spPr>
+          <a:xfrm>
+            <a:off x="1691640" y="2011680"/>
+            <a:ext cx="9631375" cy="928116"/>
+          </a:xfrm>
+          <a:prstGeom prst="rect">
+            <a:avLst/>
+          </a:prstGeom>
+          <a:noFill/>
+        </p:spPr>
+        <p:txBody>
+          <a:bodyPr wrap="square" anchor="ctr" lIns="0" rIns="0" tIns="0" bIns="0">
+            <a:spAutoFit/>
+          </a:bodyPr>
+          <a:lstStyle/>
+          <a:p>
+            <a:pPr algn="l">
+              <a:lnSpc>
+                <a:spcPct val="140000"/>
+              </a:lnSpc>
+            </a:pPr>
+            <a:r>
+              <a:rPr sz="1400" b="0">
+                <a:solidFill>
+                  <a:srgbClr val="1C2A33"/>
+                </a:solidFill>
+                <a:latin typeface="楷体"/>
+                <a:ea typeface="楷体"/>
+                <a:cs typeface="楷体"/>
+              </a:rPr>
+              <a:t>① 稳态：内环境理化性质（渗透压、pH、温度）保持相对稳定。</a:t>
+            </a:r>
+          </a:p>
+        </p:txBody>
+      </p:sp>
+      <p:sp>
+        <p:nvSpPr>
+          <p:cNvPr id="11" name="Rounded Rectangle 10"/>
+          <p:cNvSpPr/>
+          <p:nvPr/>
+        </p:nvSpPr>
+        <p:spPr>
+          <a:xfrm>
+            <a:off x="640080" y="3104388"/>
+            <a:ext cx="10911535" cy="928116"/>
+          </a:xfrm>
+          <a:prstGeom prst="roundRect">
+            <a:avLst/>
+          </a:prstGeom>
+          <a:solidFill>
+            <a:srgbClr val="FFFFFF"/>
+          </a:solidFill>
+          <a:ln w="17780">
+            <a:solidFill>
+              <a:srgbClr val="2E7D6B"/>
+            </a:solidFill>
+          </a:ln>
+          <a:effectLst/>
+        </p:spPr>
+        <p:style>
+          <a:lnRef idx="1">
+            <a:schemeClr val="accent1"/>
+          </a:lnRef>
+          <a:fillRef idx="3">
+            <a:schemeClr val="accent1"/>
+          </a:fillRef>
+          <a:effectRef idx="2">
+            <a:schemeClr val="accent1"/>
+          </a:effectRef>
+          <a:fontRef idx="minor">
+            <a:schemeClr val="lt1"/>
+          </a:fontRef>
+        </p:style>
+        <p:txBody>
+          <a:bodyPr rtlCol="0" anchor="ctr"/>
+          <a:lstStyle/>
+          <a:p>
+            <a:pPr algn="ctr"/>
+          </a:p>
+        </p:txBody>
+      </p:sp>
+      <p:sp>
+        <p:nvSpPr>
+          <p:cNvPr id="12" name="Rectangle 11"/>
+          <p:cNvSpPr/>
+          <p:nvPr/>
+        </p:nvSpPr>
+        <p:spPr>
+          <a:xfrm>
+            <a:off x="640080" y="3104388"/>
+            <a:ext cx="109728" cy="928116"/>
+          </a:xfrm>
+          <a:prstGeom prst="rect">
+            <a:avLst/>
+          </a:prstGeom>
+          <a:solidFill>
+            <a:srgbClr val="2E7D6B"/>
+          </a:solidFill>
+          <a:ln>
+            <a:noFill/>
+          </a:ln>
+          <a:effectLst/>
+        </p:spPr>
+        <p:style>
+          <a:lnRef idx="1">
+            <a:schemeClr val="accent1"/>
+          </a:lnRef>
+          <a:fillRef idx="3">
+            <a:schemeClr val="accent1"/>
+          </a:fillRef>
+          <a:effectRef idx="2">
+            <a:schemeClr val="accent1"/>
+          </a:effectRef>
+          <a:fontRef idx="minor">
+            <a:schemeClr val="lt1"/>
+          </a:fontRef>
+        </p:style>
+        <p:txBody>
+          <a:bodyPr rtlCol="0" anchor="ctr"/>
+          <a:lstStyle/>
+          <a:p>
+            <a:pPr algn="ctr"/>
+          </a:p>
+        </p:txBody>
+      </p:sp>
+      <p:sp>
+        <p:nvSpPr>
+          <p:cNvPr id="13" name="Oval 12"/>
+          <p:cNvSpPr/>
+          <p:nvPr/>
+        </p:nvSpPr>
+        <p:spPr>
+          <a:xfrm>
+            <a:off x="914400" y="3275838"/>
+            <a:ext cx="585216" cy="585216"/>
+          </a:xfrm>
+          <a:prstGeom prst="ellipse">
+            <a:avLst/>
+          </a:prstGeom>
+          <a:solidFill>
+            <a:srgbClr val="2E7D6B"/>
+          </a:solidFill>
+          <a:ln>
+            <a:noFill/>
+          </a:ln>
+          <a:effectLst/>
+        </p:spPr>
+        <p:style>
+          <a:lnRef idx="1">
+            <a:schemeClr val="accent1"/>
+          </a:lnRef>
+          <a:fillRef idx="3">
+            <a:schemeClr val="accent1"/>
+          </a:fillRef>
+          <a:effectRef idx="2">
+            <a:schemeClr val="accent1"/>
+          </a:effectRef>
+          <a:fontRef idx="minor">
+            <a:schemeClr val="lt1"/>
+          </a:fontRef>
+        </p:style>
+        <p:txBody>
+          <a:bodyPr rtlCol="0" anchor="ctr"/>
+          <a:lstStyle/>
+          <a:p>
+            <a:pPr algn="ctr"/>
+          </a:p>
+        </p:txBody>
+      </p:sp>
+      <p:sp>
+        <p:nvSpPr>
+          <p:cNvPr id="14" name="TextBox 13"/>
+          <p:cNvSpPr txBox="1"/>
+          <p:nvPr/>
+        </p:nvSpPr>
+        <p:spPr>
+          <a:xfrm>
+            <a:off x="914400" y="3367278"/>
+            <a:ext cx="585216" cy="384048"/>
+          </a:xfrm>
+          <a:prstGeom prst="rect">
+            <a:avLst/>
+          </a:prstGeom>
+          <a:noFill/>
+        </p:spPr>
+        <p:txBody>
+          <a:bodyPr wrap="square" anchor="t" lIns="0" rIns="0" tIns="0" bIns="0">
+            <a:spAutoFit/>
+          </a:bodyPr>
+          <a:lstStyle/>
+          <a:p>
+            <a:pPr algn="ctr">
+              <a:lnSpc>
+                <a:spcPct val="120000"/>
+              </a:lnSpc>
+            </a:pPr>
+            <a:r>
+              <a:rPr sz="1800" b="1">
+                <a:solidFill>
+                  <a:srgbClr val="FFFFFF"/>
+                </a:solidFill>
+                <a:latin typeface="微软雅黑"/>
+                <a:ea typeface="微软雅黑"/>
+                <a:cs typeface="微软雅黑"/>
+              </a:rPr>
+              <a:t>2</a:t>
+            </a:r>
+          </a:p>
+        </p:txBody>
+      </p:sp>
+      <p:sp>
+        <p:nvSpPr>
+          <p:cNvPr id="15" name="TextBox 14"/>
+          <p:cNvSpPr txBox="1"/>
+          <p:nvPr/>
+        </p:nvSpPr>
+        <p:spPr>
+          <a:xfrm>
+            <a:off x="1691640" y="3104388"/>
+            <a:ext cx="9631375" cy="928116"/>
+          </a:xfrm>
+          <a:prstGeom prst="rect">
+            <a:avLst/>
+          </a:prstGeom>
+          <a:noFill/>
+        </p:spPr>
+        <p:txBody>
+          <a:bodyPr wrap="square" anchor="ctr" lIns="0" rIns="0" tIns="0" bIns="0">
+            <a:spAutoFit/>
+          </a:bodyPr>
+          <a:lstStyle/>
+          <a:p>
+            <a:pPr algn="l">
+              <a:lnSpc>
+                <a:spcPct val="140000"/>
+              </a:lnSpc>
+            </a:pPr>
+            <a:r>
+              <a:rPr sz="1400" b="0">
+                <a:solidFill>
+                  <a:srgbClr val="1C2A33"/>
+                </a:solidFill>
+                <a:latin typeface="楷体"/>
+                <a:ea typeface="楷体"/>
+                <a:cs typeface="楷体"/>
+              </a:rPr>
+              <a:t>② "相对稳定"≠恒定，是动态平衡（一定范围内波动）。</a:t>
+            </a:r>
+          </a:p>
+        </p:txBody>
+      </p:sp>
+      <p:sp>
+        <p:nvSpPr>
+          <p:cNvPr id="16" name="Rounded Rectangle 15"/>
+          <p:cNvSpPr/>
+          <p:nvPr/>
+        </p:nvSpPr>
+        <p:spPr>
+          <a:xfrm>
+            <a:off x="640080" y="4197096"/>
+            <a:ext cx="10911535" cy="928116"/>
+          </a:xfrm>
+          <a:prstGeom prst="roundRect">
+            <a:avLst/>
+          </a:prstGeom>
+          <a:solidFill>
+            <a:srgbClr val="FFFFFF"/>
+          </a:solidFill>
+          <a:ln w="17780">
             <a:solidFill>
               <a:srgbClr val="C8A86B"/>
             </a:solidFill>
@@ -4926,107 +5487,23 @@
       </p:sp>
       <p:sp>
         <p:nvSpPr>
-          <p:cNvPr id="6" name="TextBox 5"/>
-          <p:cNvSpPr txBox="1"/>
-          <p:nvPr/>
-        </p:nvSpPr>
-        <p:spPr>
-          <a:xfrm>
-            <a:off x="1371600" y="1481328"/>
-            <a:ext cx="9997135" cy="457200"/>
-          </a:xfrm>
-          <a:prstGeom prst="rect">
-            <a:avLst/>
-          </a:prstGeom>
-          <a:noFill/>
-        </p:spPr>
-        <p:txBody>
-          <a:bodyPr wrap="square" anchor="t" lIns="0" rIns="0" tIns="0" bIns="0">
-            <a:spAutoFit/>
-          </a:bodyPr>
-          <a:lstStyle/>
-          <a:p>
-            <a:pPr algn="l">
-              <a:lnSpc>
-                <a:spcPct val="110000"/>
-              </a:lnSpc>
-            </a:pPr>
-            <a:r>
-              <a:rPr sz="1600" b="1">
-                <a:solidFill>
-                  <a:srgbClr val="1C2A33"/>
-                </a:solidFill>
-                <a:latin typeface="微软雅黑"/>
-                <a:ea typeface="微软雅黑"/>
-                <a:cs typeface="微软雅黑"/>
-              </a:rPr>
-              <a:t/>
-            </a:r>
-          </a:p>
-        </p:txBody>
-      </p:sp>
-      <p:sp>
-        <p:nvSpPr>
-          <p:cNvPr id="7" name="TextBox 6"/>
-          <p:cNvSpPr txBox="1"/>
-          <p:nvPr/>
-        </p:nvSpPr>
-        <p:spPr>
-          <a:xfrm>
-            <a:off x="1371600" y="1920240"/>
-            <a:ext cx="9997135" cy="530352"/>
-          </a:xfrm>
-          <a:prstGeom prst="rect">
-            <a:avLst/>
-          </a:prstGeom>
-          <a:noFill/>
-        </p:spPr>
-        <p:txBody>
-          <a:bodyPr wrap="square" anchor="t" lIns="0" rIns="0" tIns="0" bIns="0">
-            <a:spAutoFit/>
-          </a:bodyPr>
-          <a:lstStyle/>
-          <a:p>
-            <a:pPr algn="l">
-              <a:lnSpc>
-                <a:spcPct val="128000"/>
-              </a:lnSpc>
-            </a:pPr>
-            <a:r>
-              <a:rPr sz="1300" b="0">
-                <a:solidFill>
-                  <a:srgbClr val="1C2A33"/>
-                </a:solidFill>
-                <a:latin typeface="楷体"/>
-                <a:ea typeface="楷体"/>
-                <a:cs typeface="楷体"/>
-              </a:rPr>
-              <a:t>① 稳态：内环境理化性质（渗透压、pH、温度）保持相对稳定。</a:t>
-            </a:r>
-          </a:p>
-        </p:txBody>
-      </p:sp>
-      <p:sp>
-        <p:nvSpPr>
-          <p:cNvPr id="8" name="Rounded Rectangle 7"/>
+          <p:cNvPr id="17" name="Rectangle 16"/>
           <p:cNvSpPr/>
           <p:nvPr/>
         </p:nvSpPr>
         <p:spPr>
           <a:xfrm>
-            <a:off x="640080" y="2651760"/>
-            <a:ext cx="10911535" cy="1170432"/>
-          </a:xfrm>
-          <a:prstGeom prst="roundRect">
+            <a:off x="640080" y="4197096"/>
+            <a:ext cx="109728" cy="928116"/>
+          </a:xfrm>
+          <a:prstGeom prst="rect">
             <a:avLst/>
           </a:prstGeom>
           <a:solidFill>
-            <a:srgbClr val="FFFFFF"/>
+            <a:srgbClr val="C8A86B"/>
           </a:solidFill>
-          <a:ln w="22860">
-            <a:solidFill>
-              <a:srgbClr val="C8A86B"/>
-            </a:solidFill>
+          <a:ln>
+            <a:noFill/>
           </a:ln>
           <a:effectLst/>
         </p:spPr>
@@ -5054,107 +5531,23 @@
       </p:sp>
       <p:sp>
         <p:nvSpPr>
-          <p:cNvPr id="9" name="TextBox 8"/>
-          <p:cNvSpPr txBox="1"/>
-          <p:nvPr/>
-        </p:nvSpPr>
-        <p:spPr>
-          <a:xfrm>
-            <a:off x="1371600" y="2761488"/>
-            <a:ext cx="9997135" cy="457200"/>
-          </a:xfrm>
-          <a:prstGeom prst="rect">
-            <a:avLst/>
-          </a:prstGeom>
-          <a:noFill/>
-        </p:spPr>
-        <p:txBody>
-          <a:bodyPr wrap="square" anchor="t" lIns="0" rIns="0" tIns="0" bIns="0">
-            <a:spAutoFit/>
-          </a:bodyPr>
-          <a:lstStyle/>
-          <a:p>
-            <a:pPr algn="l">
-              <a:lnSpc>
-                <a:spcPct val="110000"/>
-              </a:lnSpc>
-            </a:pPr>
-            <a:r>
-              <a:rPr sz="1600" b="1">
-                <a:solidFill>
-                  <a:srgbClr val="1C2A33"/>
-                </a:solidFill>
-                <a:latin typeface="微软雅黑"/>
-                <a:ea typeface="微软雅黑"/>
-                <a:cs typeface="微软雅黑"/>
-              </a:rPr>
-              <a:t/>
-            </a:r>
-          </a:p>
-        </p:txBody>
-      </p:sp>
-      <p:sp>
-        <p:nvSpPr>
-          <p:cNvPr id="10" name="TextBox 9"/>
-          <p:cNvSpPr txBox="1"/>
-          <p:nvPr/>
-        </p:nvSpPr>
-        <p:spPr>
-          <a:xfrm>
-            <a:off x="1371600" y="3200400"/>
-            <a:ext cx="9997135" cy="530352"/>
-          </a:xfrm>
-          <a:prstGeom prst="rect">
-            <a:avLst/>
-          </a:prstGeom>
-          <a:noFill/>
-        </p:spPr>
-        <p:txBody>
-          <a:bodyPr wrap="square" anchor="t" lIns="0" rIns="0" tIns="0" bIns="0">
-            <a:spAutoFit/>
-          </a:bodyPr>
-          <a:lstStyle/>
-          <a:p>
-            <a:pPr algn="l">
-              <a:lnSpc>
-                <a:spcPct val="128000"/>
-              </a:lnSpc>
-            </a:pPr>
-            <a:r>
-              <a:rPr sz="1300" b="0">
-                <a:solidFill>
-                  <a:srgbClr val="1C2A33"/>
-                </a:solidFill>
-                <a:latin typeface="楷体"/>
-                <a:ea typeface="楷体"/>
-                <a:cs typeface="楷体"/>
-              </a:rPr>
-              <a:t>② "相对稳定"≠恒定，是动态平衡（一定范围内波动）。</a:t>
-            </a:r>
-          </a:p>
-        </p:txBody>
-      </p:sp>
-      <p:sp>
-        <p:nvSpPr>
-          <p:cNvPr id="11" name="Rounded Rectangle 10"/>
+          <p:cNvPr id="18" name="Oval 17"/>
           <p:cNvSpPr/>
           <p:nvPr/>
         </p:nvSpPr>
         <p:spPr>
           <a:xfrm>
-            <a:off x="640080" y="3931920"/>
-            <a:ext cx="10911535" cy="1170432"/>
-          </a:xfrm>
-          <a:prstGeom prst="roundRect">
+            <a:off x="914400" y="4368546"/>
+            <a:ext cx="585216" cy="585216"/>
+          </a:xfrm>
+          <a:prstGeom prst="ellipse">
             <a:avLst/>
           </a:prstGeom>
           <a:solidFill>
-            <a:srgbClr val="FFFFFF"/>
+            <a:srgbClr val="C8A86B"/>
           </a:solidFill>
-          <a:ln w="22860">
-            <a:solidFill>
-              <a:srgbClr val="C8A86B"/>
-            </a:solidFill>
+          <a:ln>
+            <a:noFill/>
           </a:ln>
           <a:effectLst/>
         </p:spPr>
@@ -5182,14 +5575,14 @@
       </p:sp>
       <p:sp>
         <p:nvSpPr>
-          <p:cNvPr id="12" name="TextBox 11"/>
+          <p:cNvPr id="19" name="TextBox 18"/>
           <p:cNvSpPr txBox="1"/>
           <p:nvPr/>
         </p:nvSpPr>
         <p:spPr>
           <a:xfrm>
-            <a:off x="1371600" y="4041648"/>
-            <a:ext cx="9997135" cy="457200"/>
+            <a:off x="914400" y="4459986"/>
+            <a:ext cx="585216" cy="384048"/>
           </a:xfrm>
           <a:prstGeom prst="rect">
             <a:avLst/>
@@ -5202,35 +5595,35 @@
           </a:bodyPr>
           <a:lstStyle/>
           <a:p>
-            <a:pPr algn="l">
+            <a:pPr algn="ctr">
               <a:lnSpc>
-                <a:spcPct val="110000"/>
+                <a:spcPct val="120000"/>
               </a:lnSpc>
             </a:pPr>
             <a:r>
-              <a:rPr sz="1600" b="1">
-                <a:solidFill>
-                  <a:srgbClr val="1C2A33"/>
+              <a:rPr sz="1800" b="1">
+                <a:solidFill>
+                  <a:srgbClr val="FFFFFF"/>
                 </a:solidFill>
                 <a:latin typeface="微软雅黑"/>
                 <a:ea typeface="微软雅黑"/>
                 <a:cs typeface="微软雅黑"/>
               </a:rPr>
-              <a:t/>
-            </a:r>
-          </a:p>
-        </p:txBody>
-      </p:sp>
-      <p:sp>
-        <p:nvSpPr>
-          <p:cNvPr id="13" name="TextBox 12"/>
+              <a:t>3</a:t>
+            </a:r>
+          </a:p>
+        </p:txBody>
+      </p:sp>
+      <p:sp>
+        <p:nvSpPr>
+          <p:cNvPr id="20" name="TextBox 19"/>
           <p:cNvSpPr txBox="1"/>
           <p:nvPr/>
         </p:nvSpPr>
         <p:spPr>
           <a:xfrm>
-            <a:off x="1371600" y="4480560"/>
-            <a:ext cx="9997135" cy="530352"/>
+            <a:off x="1691640" y="4197096"/>
+            <a:ext cx="9631375" cy="928116"/>
           </a:xfrm>
           <a:prstGeom prst="rect">
             <a:avLst/>
@@ -5238,18 +5631,18 @@
           <a:noFill/>
         </p:spPr>
         <p:txBody>
-          <a:bodyPr wrap="square" anchor="t" lIns="0" rIns="0" tIns="0" bIns="0">
+          <a:bodyPr wrap="square" anchor="ctr" lIns="0" rIns="0" tIns="0" bIns="0">
             <a:spAutoFit/>
           </a:bodyPr>
           <a:lstStyle/>
           <a:p>
             <a:pPr algn="l">
               <a:lnSpc>
-                <a:spcPct val="128000"/>
+                <a:spcPct val="140000"/>
               </a:lnSpc>
             </a:pPr>
             <a:r>
-              <a:rPr sz="1300" b="0">
+              <a:rPr sz="1400" b="0">
                 <a:solidFill>
                   <a:srgbClr val="1C2A33"/>
                 </a:solidFill>
@@ -5264,14 +5657,14 @@
       </p:sp>
       <p:sp>
         <p:nvSpPr>
-          <p:cNvPr id="14" name="Rounded Rectangle 13"/>
+          <p:cNvPr id="21" name="Rounded Rectangle 20"/>
           <p:cNvSpPr/>
           <p:nvPr/>
         </p:nvSpPr>
         <p:spPr>
           <a:xfrm>
-            <a:off x="640080" y="5212080"/>
-            <a:ext cx="10911535" cy="1170432"/>
+            <a:off x="640080" y="5289804"/>
+            <a:ext cx="10911535" cy="928116"/>
           </a:xfrm>
           <a:prstGeom prst="roundRect">
             <a:avLst/>
@@ -5279,9 +5672,9 @@
           <a:solidFill>
             <a:srgbClr val="FFFFFF"/>
           </a:solidFill>
-          <a:ln w="22860">
+          <a:ln w="17780">
             <a:solidFill>
-              <a:srgbClr val="C8A86B"/>
+              <a:srgbClr val="6B6258"/>
             </a:solidFill>
           </a:ln>
           <a:effectLst/>
@@ -5310,14 +5703,102 @@
       </p:sp>
       <p:sp>
         <p:nvSpPr>
-          <p:cNvPr id="15" name="TextBox 14"/>
+          <p:cNvPr id="22" name="Rectangle 21"/>
+          <p:cNvSpPr/>
+          <p:nvPr/>
+        </p:nvSpPr>
+        <p:spPr>
+          <a:xfrm>
+            <a:off x="640080" y="5289804"/>
+            <a:ext cx="109728" cy="928116"/>
+          </a:xfrm>
+          <a:prstGeom prst="rect">
+            <a:avLst/>
+          </a:prstGeom>
+          <a:solidFill>
+            <a:srgbClr val="6B6258"/>
+          </a:solidFill>
+          <a:ln>
+            <a:noFill/>
+          </a:ln>
+          <a:effectLst/>
+        </p:spPr>
+        <p:style>
+          <a:lnRef idx="1">
+            <a:schemeClr val="accent1"/>
+          </a:lnRef>
+          <a:fillRef idx="3">
+            <a:schemeClr val="accent1"/>
+          </a:fillRef>
+          <a:effectRef idx="2">
+            <a:schemeClr val="accent1"/>
+          </a:effectRef>
+          <a:fontRef idx="minor">
+            <a:schemeClr val="lt1"/>
+          </a:fontRef>
+        </p:style>
+        <p:txBody>
+          <a:bodyPr rtlCol="0" anchor="ctr"/>
+          <a:lstStyle/>
+          <a:p>
+            <a:pPr algn="ctr"/>
+          </a:p>
+        </p:txBody>
+      </p:sp>
+      <p:sp>
+        <p:nvSpPr>
+          <p:cNvPr id="23" name="Oval 22"/>
+          <p:cNvSpPr/>
+          <p:nvPr/>
+        </p:nvSpPr>
+        <p:spPr>
+          <a:xfrm>
+            <a:off x="914400" y="5461254"/>
+            <a:ext cx="585216" cy="585216"/>
+          </a:xfrm>
+          <a:prstGeom prst="ellipse">
+            <a:avLst/>
+          </a:prstGeom>
+          <a:solidFill>
+            <a:srgbClr val="6B6258"/>
+          </a:solidFill>
+          <a:ln>
+            <a:noFill/>
+          </a:ln>
+          <a:effectLst/>
+        </p:spPr>
+        <p:style>
+          <a:lnRef idx="1">
+            <a:schemeClr val="accent1"/>
+          </a:lnRef>
+          <a:fillRef idx="3">
+            <a:schemeClr val="accent1"/>
+          </a:fillRef>
+          <a:effectRef idx="2">
+            <a:schemeClr val="accent1"/>
+          </a:effectRef>
+          <a:fontRef idx="minor">
+            <a:schemeClr val="lt1"/>
+          </a:fontRef>
+        </p:style>
+        <p:txBody>
+          <a:bodyPr rtlCol="0" anchor="ctr"/>
+          <a:lstStyle/>
+          <a:p>
+            <a:pPr algn="ctr"/>
+          </a:p>
+        </p:txBody>
+      </p:sp>
+      <p:sp>
+        <p:nvSpPr>
+          <p:cNvPr id="24" name="TextBox 23"/>
           <p:cNvSpPr txBox="1"/>
           <p:nvPr/>
         </p:nvSpPr>
         <p:spPr>
           <a:xfrm>
-            <a:off x="1371600" y="5321808"/>
-            <a:ext cx="9997135" cy="457200"/>
+            <a:off x="914400" y="5552694"/>
+            <a:ext cx="585216" cy="384048"/>
           </a:xfrm>
           <a:prstGeom prst="rect">
             <a:avLst/>
@@ -5330,35 +5811,35 @@
           </a:bodyPr>
           <a:lstStyle/>
           <a:p>
-            <a:pPr algn="l">
+            <a:pPr algn="ctr">
               <a:lnSpc>
-                <a:spcPct val="110000"/>
+                <a:spcPct val="120000"/>
               </a:lnSpc>
             </a:pPr>
             <a:r>
-              <a:rPr sz="1600" b="1">
-                <a:solidFill>
-                  <a:srgbClr val="1C2A33"/>
+              <a:rPr sz="1800" b="1">
+                <a:solidFill>
+                  <a:srgbClr val="FFFFFF"/>
                 </a:solidFill>
                 <a:latin typeface="微软雅黑"/>
                 <a:ea typeface="微软雅黑"/>
                 <a:cs typeface="微软雅黑"/>
               </a:rPr>
-              <a:t/>
-            </a:r>
-          </a:p>
-        </p:txBody>
-      </p:sp>
-      <p:sp>
-        <p:nvSpPr>
-          <p:cNvPr id="16" name="TextBox 15"/>
+              <a:t>4</a:t>
+            </a:r>
+          </a:p>
+        </p:txBody>
+      </p:sp>
+      <p:sp>
+        <p:nvSpPr>
+          <p:cNvPr id="25" name="TextBox 24"/>
           <p:cNvSpPr txBox="1"/>
           <p:nvPr/>
         </p:nvSpPr>
         <p:spPr>
           <a:xfrm>
-            <a:off x="1371600" y="5760720"/>
-            <a:ext cx="9997135" cy="530352"/>
+            <a:off x="1691640" y="5289804"/>
+            <a:ext cx="9631375" cy="928116"/>
           </a:xfrm>
           <a:prstGeom prst="rect">
             <a:avLst/>
@@ -5366,18 +5847,18 @@
           <a:noFill/>
         </p:spPr>
         <p:txBody>
-          <a:bodyPr wrap="square" anchor="t" lIns="0" rIns="0" tIns="0" bIns="0">
+          <a:bodyPr wrap="square" anchor="ctr" lIns="0" rIns="0" tIns="0" bIns="0">
             <a:spAutoFit/>
           </a:bodyPr>
           <a:lstStyle/>
           <a:p>
             <a:pPr algn="l">
               <a:lnSpc>
-                <a:spcPct val="128000"/>
+                <a:spcPct val="140000"/>
               </a:lnSpc>
             </a:pPr>
             <a:r>
-              <a:rPr sz="1300" b="0">
+              <a:rPr sz="1400" b="0">
                 <a:solidFill>
                   <a:srgbClr val="1C2A33"/>
                 </a:solidFill>
@@ -5392,7 +5873,7 @@
       </p:sp>
       <p:sp>
         <p:nvSpPr>
-          <p:cNvPr id="17" name="TextBox 16"/>
+          <p:cNvPr id="26" name="TextBox 25"/>
           <p:cNvSpPr txBox="1"/>
           <p:nvPr/>
         </p:nvSpPr>
@@ -5519,13 +6000,13 @@
             <a:r>
               <a:rPr sz="1300" b="1">
                 <a:solidFill>
-                  <a:srgbClr val="2E7D6B"/>
+                  <a:srgbClr val="B23A2A"/>
                 </a:solidFill>
                 <a:latin typeface="微软雅黑"/>
                 <a:ea typeface="微软雅黑"/>
                 <a:cs typeface="微软雅黑"/>
               </a:rPr>
-              <a:t>学习路径</a:t>
+              <a:t>方法</a:t>
             </a:r>
           </a:p>
         </p:txBody>
@@ -5540,6 +6021,309 @@
           <a:xfrm>
             <a:off x="640080" y="1097280"/>
             <a:ext cx="822960" cy="30480"/>
+          </a:xfrm>
+          <a:prstGeom prst="rect">
+            <a:avLst/>
+          </a:prstGeom>
+          <a:solidFill>
+            <a:srgbClr val="B23A2A"/>
+          </a:solidFill>
+          <a:ln>
+            <a:noFill/>
+          </a:ln>
+          <a:effectLst/>
+        </p:spPr>
+        <p:style>
+          <a:lnRef idx="1">
+            <a:schemeClr val="accent1"/>
+          </a:lnRef>
+          <a:fillRef idx="3">
+            <a:schemeClr val="accent1"/>
+          </a:fillRef>
+          <a:effectRef idx="2">
+            <a:schemeClr val="accent1"/>
+          </a:effectRef>
+          <a:fontRef idx="minor">
+            <a:schemeClr val="lt1"/>
+          </a:fontRef>
+        </p:style>
+        <p:txBody>
+          <a:bodyPr rtlCol="0" anchor="ctr"/>
+          <a:lstStyle/>
+          <a:p>
+            <a:pPr algn="ctr"/>
+          </a:p>
+        </p:txBody>
+      </p:sp>
+      <p:sp>
+        <p:nvSpPr>
+          <p:cNvPr id="5" name="TextBox 4"/>
+          <p:cNvSpPr txBox="1"/>
+          <p:nvPr/>
+        </p:nvSpPr>
+        <p:spPr>
+          <a:xfrm>
+            <a:off x="640080" y="1325880"/>
+            <a:ext cx="10911535" cy="548640"/>
+          </a:xfrm>
+          <a:prstGeom prst="rect">
+            <a:avLst/>
+          </a:prstGeom>
+          <a:noFill/>
+        </p:spPr>
+        <p:txBody>
+          <a:bodyPr wrap="square" anchor="t" lIns="0" rIns="0" tIns="0" bIns="0">
+            <a:spAutoFit/>
+          </a:bodyPr>
+          <a:lstStyle/>
+          <a:p>
+            <a:pPr algn="l">
+              <a:lnSpc>
+                <a:spcPct val="130000"/>
+              </a:lnSpc>
+            </a:pPr>
+            <a:r>
+              <a:rPr sz="2800" b="1">
+                <a:solidFill>
+                  <a:srgbClr val="1C2A33"/>
+                </a:solidFill>
+                <a:latin typeface="楷体"/>
+                <a:ea typeface="楷体"/>
+                <a:cs typeface="楷体"/>
+              </a:rPr>
+              <a:t>怎么学 · 方法指引</a:t>
+            </a:r>
+          </a:p>
+        </p:txBody>
+      </p:sp>
+      <p:sp>
+        <p:nvSpPr>
+          <p:cNvPr id="6" name="Rounded Rectangle 5"/>
+          <p:cNvSpPr/>
+          <p:nvPr/>
+        </p:nvSpPr>
+        <p:spPr>
+          <a:xfrm>
+            <a:off x="640080" y="2194560"/>
+            <a:ext cx="5272887" cy="1965960"/>
+          </a:xfrm>
+          <a:prstGeom prst="roundRect">
+            <a:avLst/>
+          </a:prstGeom>
+          <a:solidFill>
+            <a:srgbClr val="FFFFFF"/>
+          </a:solidFill>
+          <a:ln w="20320">
+            <a:solidFill>
+              <a:srgbClr val="B23A2A"/>
+            </a:solidFill>
+          </a:ln>
+          <a:effectLst/>
+        </p:spPr>
+        <p:style>
+          <a:lnRef idx="1">
+            <a:schemeClr val="accent1"/>
+          </a:lnRef>
+          <a:fillRef idx="3">
+            <a:schemeClr val="accent1"/>
+          </a:fillRef>
+          <a:effectRef idx="2">
+            <a:schemeClr val="accent1"/>
+          </a:effectRef>
+          <a:fontRef idx="minor">
+            <a:schemeClr val="lt1"/>
+          </a:fontRef>
+        </p:style>
+        <p:txBody>
+          <a:bodyPr rtlCol="0" anchor="ctr"/>
+          <a:lstStyle/>
+          <a:p>
+            <a:pPr algn="ctr"/>
+          </a:p>
+        </p:txBody>
+      </p:sp>
+      <p:sp>
+        <p:nvSpPr>
+          <p:cNvPr id="7" name="Rectangle 6"/>
+          <p:cNvSpPr/>
+          <p:nvPr/>
+        </p:nvSpPr>
+        <p:spPr>
+          <a:xfrm>
+            <a:off x="640080" y="2194560"/>
+            <a:ext cx="5272887" cy="502920"/>
+          </a:xfrm>
+          <a:prstGeom prst="rect">
+            <a:avLst/>
+          </a:prstGeom>
+          <a:solidFill>
+            <a:srgbClr val="B23A2A"/>
+          </a:solidFill>
+          <a:ln>
+            <a:noFill/>
+          </a:ln>
+          <a:effectLst/>
+        </p:spPr>
+        <p:style>
+          <a:lnRef idx="1">
+            <a:schemeClr val="accent1"/>
+          </a:lnRef>
+          <a:fillRef idx="3">
+            <a:schemeClr val="accent1"/>
+          </a:fillRef>
+          <a:effectRef idx="2">
+            <a:schemeClr val="accent1"/>
+          </a:effectRef>
+          <a:fontRef idx="minor">
+            <a:schemeClr val="lt1"/>
+          </a:fontRef>
+        </p:style>
+        <p:txBody>
+          <a:bodyPr rtlCol="0" anchor="ctr"/>
+          <a:lstStyle/>
+          <a:p>
+            <a:pPr algn="ctr"/>
+          </a:p>
+        </p:txBody>
+      </p:sp>
+      <p:sp>
+        <p:nvSpPr>
+          <p:cNvPr id="8" name="TextBox 7"/>
+          <p:cNvSpPr txBox="1"/>
+          <p:nvPr/>
+        </p:nvSpPr>
+        <p:spPr>
+          <a:xfrm>
+            <a:off x="640080" y="2258568"/>
+            <a:ext cx="5272887" cy="384048"/>
+          </a:xfrm>
+          <a:prstGeom prst="rect">
+            <a:avLst/>
+          </a:prstGeom>
+          <a:noFill/>
+        </p:spPr>
+        <p:txBody>
+          <a:bodyPr wrap="square" anchor="t" lIns="0" rIns="0" tIns="0" bIns="0">
+            <a:spAutoFit/>
+          </a:bodyPr>
+          <a:lstStyle/>
+          <a:p>
+            <a:pPr algn="ctr">
+              <a:lnSpc>
+                <a:spcPct val="120000"/>
+              </a:lnSpc>
+            </a:pPr>
+            <a:r>
+              <a:rPr sz="1600" b="1">
+                <a:solidFill>
+                  <a:srgbClr val="FFFFFF"/>
+                </a:solidFill>
+                <a:latin typeface="微软雅黑"/>
+                <a:ea typeface="微软雅黑"/>
+                <a:cs typeface="微软雅黑"/>
+              </a:rPr>
+              <a:t>方法 1</a:t>
+            </a:r>
+          </a:p>
+        </p:txBody>
+      </p:sp>
+      <p:sp>
+        <p:nvSpPr>
+          <p:cNvPr id="9" name="TextBox 8"/>
+          <p:cNvSpPr txBox="1"/>
+          <p:nvPr/>
+        </p:nvSpPr>
+        <p:spPr>
+          <a:xfrm>
+            <a:off x="914400" y="2880360"/>
+            <a:ext cx="4724247" cy="1143000"/>
+          </a:xfrm>
+          <a:prstGeom prst="rect">
+            <a:avLst/>
+          </a:prstGeom>
+          <a:noFill/>
+        </p:spPr>
+        <p:txBody>
+          <a:bodyPr wrap="square" anchor="t" lIns="0" rIns="0" tIns="0" bIns="0">
+            <a:spAutoFit/>
+          </a:bodyPr>
+          <a:lstStyle/>
+          <a:p>
+            <a:pPr algn="ctr">
+              <a:lnSpc>
+                <a:spcPct val="150000"/>
+              </a:lnSpc>
+            </a:pPr>
+            <a:r>
+              <a:rPr sz="1450" b="0">
+                <a:solidFill>
+                  <a:srgbClr val="1C2A33"/>
+                </a:solidFill>
+                <a:latin typeface="楷体"/>
+                <a:ea typeface="楷体"/>
+                <a:cs typeface="楷体"/>
+              </a:rPr>
+              <a:t>① 概念澄清法(相对稳定)。</a:t>
+            </a:r>
+          </a:p>
+        </p:txBody>
+      </p:sp>
+      <p:sp>
+        <p:nvSpPr>
+          <p:cNvPr id="10" name="Rounded Rectangle 9"/>
+          <p:cNvSpPr/>
+          <p:nvPr/>
+        </p:nvSpPr>
+        <p:spPr>
+          <a:xfrm>
+            <a:off x="6278727" y="2194560"/>
+            <a:ext cx="5272887" cy="1965960"/>
+          </a:xfrm>
+          <a:prstGeom prst="roundRect">
+            <a:avLst/>
+          </a:prstGeom>
+          <a:solidFill>
+            <a:srgbClr val="FFFFFF"/>
+          </a:solidFill>
+          <a:ln w="20320">
+            <a:solidFill>
+              <a:srgbClr val="2E7D6B"/>
+            </a:solidFill>
+          </a:ln>
+          <a:effectLst/>
+        </p:spPr>
+        <p:style>
+          <a:lnRef idx="1">
+            <a:schemeClr val="accent1"/>
+          </a:lnRef>
+          <a:fillRef idx="3">
+            <a:schemeClr val="accent1"/>
+          </a:fillRef>
+          <a:effectRef idx="2">
+            <a:schemeClr val="accent1"/>
+          </a:effectRef>
+          <a:fontRef idx="minor">
+            <a:schemeClr val="lt1"/>
+          </a:fontRef>
+        </p:style>
+        <p:txBody>
+          <a:bodyPr rtlCol="0" anchor="ctr"/>
+          <a:lstStyle/>
+          <a:p>
+            <a:pPr algn="ctr"/>
+          </a:p>
+        </p:txBody>
+      </p:sp>
+      <p:sp>
+        <p:nvSpPr>
+          <p:cNvPr id="11" name="Rectangle 10"/>
+          <p:cNvSpPr/>
+          <p:nvPr/>
+        </p:nvSpPr>
+        <p:spPr>
+          <a:xfrm>
+            <a:off x="6278727" y="2194560"/>
+            <a:ext cx="5272887" cy="502920"/>
           </a:xfrm>
           <a:prstGeom prst="rect">
             <a:avLst/>
@@ -5576,14 +6360,96 @@
       </p:sp>
       <p:sp>
         <p:nvSpPr>
-          <p:cNvPr id="5" name="Rounded Rectangle 4"/>
+          <p:cNvPr id="12" name="TextBox 11"/>
+          <p:cNvSpPr txBox="1"/>
+          <p:nvPr/>
+        </p:nvSpPr>
+        <p:spPr>
+          <a:xfrm>
+            <a:off x="6278727" y="2258568"/>
+            <a:ext cx="5272887" cy="384048"/>
+          </a:xfrm>
+          <a:prstGeom prst="rect">
+            <a:avLst/>
+          </a:prstGeom>
+          <a:noFill/>
+        </p:spPr>
+        <p:txBody>
+          <a:bodyPr wrap="square" anchor="t" lIns="0" rIns="0" tIns="0" bIns="0">
+            <a:spAutoFit/>
+          </a:bodyPr>
+          <a:lstStyle/>
+          <a:p>
+            <a:pPr algn="ctr">
+              <a:lnSpc>
+                <a:spcPct val="120000"/>
+              </a:lnSpc>
+            </a:pPr>
+            <a:r>
+              <a:rPr sz="1600" b="1">
+                <a:solidFill>
+                  <a:srgbClr val="FFFFFF"/>
+                </a:solidFill>
+                <a:latin typeface="微软雅黑"/>
+                <a:ea typeface="微软雅黑"/>
+                <a:cs typeface="微软雅黑"/>
+              </a:rPr>
+              <a:t>方法 2</a:t>
+            </a:r>
+          </a:p>
+        </p:txBody>
+      </p:sp>
+      <p:sp>
+        <p:nvSpPr>
+          <p:cNvPr id="13" name="TextBox 12"/>
+          <p:cNvSpPr txBox="1"/>
+          <p:nvPr/>
+        </p:nvSpPr>
+        <p:spPr>
+          <a:xfrm>
+            <a:off x="6553047" y="2880360"/>
+            <a:ext cx="4724247" cy="1143000"/>
+          </a:xfrm>
+          <a:prstGeom prst="rect">
+            <a:avLst/>
+          </a:prstGeom>
+          <a:noFill/>
+        </p:spPr>
+        <p:txBody>
+          <a:bodyPr wrap="square" anchor="t" lIns="0" rIns="0" tIns="0" bIns="0">
+            <a:spAutoFit/>
+          </a:bodyPr>
+          <a:lstStyle/>
+          <a:p>
+            <a:pPr algn="ctr">
+              <a:lnSpc>
+                <a:spcPct val="150000"/>
+              </a:lnSpc>
+            </a:pPr>
+            <a:r>
+              <a:rPr sz="1450" b="0">
+                <a:solidFill>
+                  <a:srgbClr val="1C2A33"/>
+                </a:solidFill>
+                <a:latin typeface="楷体"/>
+                <a:ea typeface="楷体"/>
+                <a:cs typeface="楷体"/>
+              </a:rPr>
+              <a:t>② 网络图解法(三类调节)。</a:t>
+            </a:r>
+          </a:p>
+        </p:txBody>
+      </p:sp>
+      <p:sp>
+        <p:nvSpPr>
+          <p:cNvPr id="14" name="Rounded Rectangle 13"/>
           <p:cNvSpPr/>
           <p:nvPr/>
         </p:nvSpPr>
         <p:spPr>
           <a:xfrm>
-            <a:off x="640080" y="1371600"/>
-            <a:ext cx="10911535" cy="685800"/>
+            <a:off x="640080" y="4434840"/>
+            <a:ext cx="5272887" cy="1965960"/>
           </a:xfrm>
           <a:prstGeom prst="roundRect">
             <a:avLst/>
@@ -5591,9 +6457,9 @@
           <a:solidFill>
             <a:srgbClr val="FFFFFF"/>
           </a:solidFill>
-          <a:ln w="22860">
+          <a:ln w="20320">
             <a:solidFill>
-              <a:srgbClr val="2E7D6B"/>
+              <a:srgbClr val="C8A86B"/>
             </a:solidFill>
           </a:ln>
           <a:effectLst/>
@@ -5622,20 +6488,20 @@
       </p:sp>
       <p:sp>
         <p:nvSpPr>
-          <p:cNvPr id="6" name="Oval 5"/>
+          <p:cNvPr id="15" name="Rectangle 14"/>
           <p:cNvSpPr/>
           <p:nvPr/>
         </p:nvSpPr>
         <p:spPr>
           <a:xfrm>
-            <a:off x="804672" y="1536192"/>
-            <a:ext cx="457200" cy="457200"/>
-          </a:xfrm>
-          <a:prstGeom prst="ellipse">
+            <a:off x="640080" y="4434840"/>
+            <a:ext cx="5272887" cy="502920"/>
+          </a:xfrm>
+          <a:prstGeom prst="rect">
             <a:avLst/>
           </a:prstGeom>
           <a:solidFill>
-            <a:srgbClr val="2E7D6B"/>
+            <a:srgbClr val="C8A86B"/>
           </a:solidFill>
           <a:ln>
             <a:noFill/>
@@ -5666,14 +6532,14 @@
       </p:sp>
       <p:sp>
         <p:nvSpPr>
-          <p:cNvPr id="7" name="TextBox 6"/>
+          <p:cNvPr id="16" name="TextBox 15"/>
           <p:cNvSpPr txBox="1"/>
           <p:nvPr/>
         </p:nvSpPr>
         <p:spPr>
           <a:xfrm>
-            <a:off x="804672" y="1591056"/>
-            <a:ext cx="457200" cy="384048"/>
+            <a:off x="640080" y="4498848"/>
+            <a:ext cx="5272887" cy="384048"/>
           </a:xfrm>
           <a:prstGeom prst="rect">
             <a:avLst/>
@@ -5686,7 +6552,11 @@
           </a:bodyPr>
           <a:lstStyle/>
           <a:p>
-            <a:pPr algn="ctr"/>
+            <a:pPr algn="ctr">
+              <a:lnSpc>
+                <a:spcPct val="120000"/>
+              </a:lnSpc>
+            </a:pPr>
             <a:r>
               <a:rPr sz="1600" b="1">
                 <a:solidFill>
@@ -5696,21 +6566,21 @@
                 <a:ea typeface="微软雅黑"/>
                 <a:cs typeface="微软雅黑"/>
               </a:rPr>
-              <a:t>1</a:t>
-            </a:r>
-          </a:p>
-        </p:txBody>
-      </p:sp>
-      <p:sp>
-        <p:nvSpPr>
-          <p:cNvPr id="8" name="TextBox 7"/>
+              <a:t>方法 3</a:t>
+            </a:r>
+          </a:p>
+        </p:txBody>
+      </p:sp>
+      <p:sp>
+        <p:nvSpPr>
+          <p:cNvPr id="17" name="TextBox 16"/>
           <p:cNvSpPr txBox="1"/>
           <p:nvPr/>
         </p:nvSpPr>
         <p:spPr>
           <a:xfrm>
-            <a:off x="1371600" y="1481328"/>
-            <a:ext cx="9997135" cy="484632"/>
+            <a:off x="914400" y="5120640"/>
+            <a:ext cx="4724247" cy="1143000"/>
           </a:xfrm>
           <a:prstGeom prst="rect">
             <a:avLst/>
@@ -5723,35 +6593,35 @@
           </a:bodyPr>
           <a:lstStyle/>
           <a:p>
-            <a:pPr algn="l">
+            <a:pPr algn="ctr">
               <a:lnSpc>
-                <a:spcPct val="110000"/>
+                <a:spcPct val="150000"/>
               </a:lnSpc>
             </a:pPr>
             <a:r>
-              <a:rPr sz="1600" b="1">
+              <a:rPr sz="1450" b="0">
                 <a:solidFill>
                   <a:srgbClr val="1C2A33"/>
                 </a:solidFill>
-                <a:latin typeface="微软雅黑"/>
-                <a:ea typeface="微软雅黑"/>
-                <a:cs typeface="微软雅黑"/>
+                <a:latin typeface="楷体"/>
+                <a:ea typeface="楷体"/>
+                <a:cs typeface="楷体"/>
               </a:rPr>
-              <a:t>Step 1 导入</a:t>
-            </a:r>
-          </a:p>
-        </p:txBody>
-      </p:sp>
-      <p:sp>
-        <p:nvSpPr>
-          <p:cNvPr id="9" name="Rounded Rectangle 8"/>
+              <a:t>③ 指标列表法。</a:t>
+            </a:r>
+          </a:p>
+        </p:txBody>
+      </p:sp>
+      <p:sp>
+        <p:nvSpPr>
+          <p:cNvPr id="18" name="Rounded Rectangle 17"/>
           <p:cNvSpPr/>
           <p:nvPr/>
         </p:nvSpPr>
         <p:spPr>
           <a:xfrm>
-            <a:off x="640080" y="2194560"/>
-            <a:ext cx="10911535" cy="685800"/>
+            <a:off x="6278727" y="4434840"/>
+            <a:ext cx="5272887" cy="1965960"/>
           </a:xfrm>
           <a:prstGeom prst="roundRect">
             <a:avLst/>
@@ -5759,9 +6629,9 @@
           <a:solidFill>
             <a:srgbClr val="FFFFFF"/>
           </a:solidFill>
-          <a:ln w="22860">
+          <a:ln w="20320">
             <a:solidFill>
-              <a:srgbClr val="2E7D6B"/>
+              <a:srgbClr val="6B6258"/>
             </a:solidFill>
           </a:ln>
           <a:effectLst/>
@@ -5790,20 +6660,20 @@
       </p:sp>
       <p:sp>
         <p:nvSpPr>
-          <p:cNvPr id="10" name="Oval 9"/>
+          <p:cNvPr id="19" name="Rectangle 18"/>
           <p:cNvSpPr/>
           <p:nvPr/>
         </p:nvSpPr>
         <p:spPr>
           <a:xfrm>
-            <a:off x="804672" y="2359152"/>
-            <a:ext cx="457200" cy="457200"/>
-          </a:xfrm>
-          <a:prstGeom prst="ellipse">
+            <a:off x="6278727" y="4434840"/>
+            <a:ext cx="5272887" cy="502920"/>
+          </a:xfrm>
+          <a:prstGeom prst="rect">
             <a:avLst/>
           </a:prstGeom>
           <a:solidFill>
-            <a:srgbClr val="2E7D6B"/>
+            <a:srgbClr val="6B6258"/>
           </a:solidFill>
           <a:ln>
             <a:noFill/>
@@ -5834,14 +6704,14 @@
       </p:sp>
       <p:sp>
         <p:nvSpPr>
-          <p:cNvPr id="11" name="TextBox 10"/>
+          <p:cNvPr id="20" name="TextBox 19"/>
           <p:cNvSpPr txBox="1"/>
           <p:nvPr/>
         </p:nvSpPr>
         <p:spPr>
           <a:xfrm>
-            <a:off x="804672" y="2414016"/>
-            <a:ext cx="457200" cy="384048"/>
+            <a:off x="6278727" y="4498848"/>
+            <a:ext cx="5272887" cy="384048"/>
           </a:xfrm>
           <a:prstGeom prst="rect">
             <a:avLst/>
@@ -5854,7 +6724,11 @@
           </a:bodyPr>
           <a:lstStyle/>
           <a:p>
-            <a:pPr algn="ctr"/>
+            <a:pPr algn="ctr">
+              <a:lnSpc>
+                <a:spcPct val="120000"/>
+              </a:lnSpc>
+            </a:pPr>
             <a:r>
               <a:rPr sz="1600" b="1">
                 <a:solidFill>
@@ -5864,21 +6738,21 @@
                 <a:ea typeface="微软雅黑"/>
                 <a:cs typeface="微软雅黑"/>
               </a:rPr>
-              <a:t>2</a:t>
-            </a:r>
-          </a:p>
-        </p:txBody>
-      </p:sp>
-      <p:sp>
-        <p:nvSpPr>
-          <p:cNvPr id="12" name="TextBox 11"/>
+              <a:t>方法 4</a:t>
+            </a:r>
+          </a:p>
+        </p:txBody>
+      </p:sp>
+      <p:sp>
+        <p:nvSpPr>
+          <p:cNvPr id="21" name="TextBox 20"/>
           <p:cNvSpPr txBox="1"/>
           <p:nvPr/>
         </p:nvSpPr>
         <p:spPr>
           <a:xfrm>
-            <a:off x="1371600" y="2304288"/>
-            <a:ext cx="9997135" cy="484632"/>
+            <a:off x="6553047" y="5120640"/>
+            <a:ext cx="4724247" cy="1143000"/>
           </a:xfrm>
           <a:prstGeom prst="rect">
             <a:avLst/>
@@ -5891,700 +6765,28 @@
           </a:bodyPr>
           <a:lstStyle/>
           <a:p>
-            <a:pPr algn="l">
+            <a:pPr algn="ctr">
               <a:lnSpc>
-                <a:spcPct val="110000"/>
+                <a:spcPct val="150000"/>
               </a:lnSpc>
             </a:pPr>
             <a:r>
-              <a:rPr sz="1600" b="1">
+              <a:rPr sz="1450" b="0">
                 <a:solidFill>
                   <a:srgbClr val="1C2A33"/>
                 </a:solidFill>
-                <a:latin typeface="微软雅黑"/>
-                <a:ea typeface="微软雅黑"/>
-                <a:cs typeface="微软雅黑"/>
+                <a:latin typeface="楷体"/>
+                <a:ea typeface="楷体"/>
+                <a:cs typeface="楷体"/>
               </a:rPr>
-              <a:t>Step 2 相对稳定</a:t>
-            </a:r>
-          </a:p>
-        </p:txBody>
-      </p:sp>
-      <p:sp>
-        <p:nvSpPr>
-          <p:cNvPr id="13" name="Rounded Rectangle 12"/>
-          <p:cNvSpPr/>
-          <p:nvPr/>
-        </p:nvSpPr>
-        <p:spPr>
-          <a:xfrm>
-            <a:off x="640080" y="3017520"/>
-            <a:ext cx="10911535" cy="685800"/>
-          </a:xfrm>
-          <a:prstGeom prst="roundRect">
-            <a:avLst/>
-          </a:prstGeom>
-          <a:solidFill>
-            <a:srgbClr val="FFFFFF"/>
-          </a:solidFill>
-          <a:ln w="22860">
-            <a:solidFill>
-              <a:srgbClr val="2E7D6B"/>
-            </a:solidFill>
-          </a:ln>
-          <a:effectLst/>
-        </p:spPr>
-        <p:style>
-          <a:lnRef idx="1">
-            <a:schemeClr val="accent1"/>
-          </a:lnRef>
-          <a:fillRef idx="3">
-            <a:schemeClr val="accent1"/>
-          </a:fillRef>
-          <a:effectRef idx="2">
-            <a:schemeClr val="accent1"/>
-          </a:effectRef>
-          <a:fontRef idx="minor">
-            <a:schemeClr val="lt1"/>
-          </a:fontRef>
-        </p:style>
-        <p:txBody>
-          <a:bodyPr rtlCol="0" anchor="ctr"/>
-          <a:lstStyle/>
-          <a:p>
-            <a:pPr algn="ctr"/>
-          </a:p>
-        </p:txBody>
-      </p:sp>
-      <p:sp>
-        <p:nvSpPr>
-          <p:cNvPr id="14" name="Oval 13"/>
-          <p:cNvSpPr/>
-          <p:nvPr/>
-        </p:nvSpPr>
-        <p:spPr>
-          <a:xfrm>
-            <a:off x="804672" y="3182112"/>
-            <a:ext cx="457200" cy="457200"/>
-          </a:xfrm>
-          <a:prstGeom prst="ellipse">
-            <a:avLst/>
-          </a:prstGeom>
-          <a:solidFill>
-            <a:srgbClr val="2E7D6B"/>
-          </a:solidFill>
-          <a:ln>
-            <a:noFill/>
-          </a:ln>
-          <a:effectLst/>
-        </p:spPr>
-        <p:style>
-          <a:lnRef idx="1">
-            <a:schemeClr val="accent1"/>
-          </a:lnRef>
-          <a:fillRef idx="3">
-            <a:schemeClr val="accent1"/>
-          </a:fillRef>
-          <a:effectRef idx="2">
-            <a:schemeClr val="accent1"/>
-          </a:effectRef>
-          <a:fontRef idx="minor">
-            <a:schemeClr val="lt1"/>
-          </a:fontRef>
-        </p:style>
-        <p:txBody>
-          <a:bodyPr rtlCol="0" anchor="ctr"/>
-          <a:lstStyle/>
-          <a:p>
-            <a:pPr algn="ctr"/>
-          </a:p>
-        </p:txBody>
-      </p:sp>
-      <p:sp>
-        <p:nvSpPr>
-          <p:cNvPr id="15" name="TextBox 14"/>
-          <p:cNvSpPr txBox="1"/>
-          <p:nvPr/>
-        </p:nvSpPr>
-        <p:spPr>
-          <a:xfrm>
-            <a:off x="804672" y="3236976"/>
-            <a:ext cx="457200" cy="384048"/>
-          </a:xfrm>
-          <a:prstGeom prst="rect">
-            <a:avLst/>
-          </a:prstGeom>
-          <a:noFill/>
-        </p:spPr>
-        <p:txBody>
-          <a:bodyPr wrap="square" anchor="t" lIns="0" rIns="0" tIns="0" bIns="0">
-            <a:spAutoFit/>
-          </a:bodyPr>
-          <a:lstStyle/>
-          <a:p>
-            <a:pPr algn="ctr"/>
-            <a:r>
-              <a:rPr sz="1600" b="1">
-                <a:solidFill>
-                  <a:srgbClr val="FFFFFF"/>
-                </a:solidFill>
-                <a:latin typeface="微软雅黑"/>
-                <a:ea typeface="微软雅黑"/>
-                <a:cs typeface="微软雅黑"/>
-              </a:rPr>
-              <a:t>3</a:t>
-            </a:r>
-          </a:p>
-        </p:txBody>
-      </p:sp>
-      <p:sp>
-        <p:nvSpPr>
-          <p:cNvPr id="16" name="TextBox 15"/>
-          <p:cNvSpPr txBox="1"/>
-          <p:nvPr/>
-        </p:nvSpPr>
-        <p:spPr>
-          <a:xfrm>
-            <a:off x="1371600" y="3127248"/>
-            <a:ext cx="9997135" cy="484632"/>
-          </a:xfrm>
-          <a:prstGeom prst="rect">
-            <a:avLst/>
-          </a:prstGeom>
-          <a:noFill/>
-        </p:spPr>
-        <p:txBody>
-          <a:bodyPr wrap="square" anchor="t" lIns="0" rIns="0" tIns="0" bIns="0">
-            <a:spAutoFit/>
-          </a:bodyPr>
-          <a:lstStyle/>
-          <a:p>
-            <a:pPr algn="l">
-              <a:lnSpc>
-                <a:spcPct val="110000"/>
-              </a:lnSpc>
-            </a:pPr>
-            <a:r>
-              <a:rPr sz="1600" b="1">
-                <a:solidFill>
-                  <a:srgbClr val="1C2A33"/>
-                </a:solidFill>
-                <a:latin typeface="微软雅黑"/>
-                <a:ea typeface="微软雅黑"/>
-                <a:cs typeface="微软雅黑"/>
-              </a:rPr>
-              <a:t>Step 3 理化指标</a:t>
-            </a:r>
-          </a:p>
-        </p:txBody>
-      </p:sp>
-      <p:sp>
-        <p:nvSpPr>
-          <p:cNvPr id="17" name="Rounded Rectangle 16"/>
-          <p:cNvSpPr/>
-          <p:nvPr/>
-        </p:nvSpPr>
-        <p:spPr>
-          <a:xfrm>
-            <a:off x="640080" y="3840480"/>
-            <a:ext cx="10911535" cy="685800"/>
-          </a:xfrm>
-          <a:prstGeom prst="roundRect">
-            <a:avLst/>
-          </a:prstGeom>
-          <a:solidFill>
-            <a:srgbClr val="FFFFFF"/>
-          </a:solidFill>
-          <a:ln w="22860">
-            <a:solidFill>
-              <a:srgbClr val="2E7D6B"/>
-            </a:solidFill>
-          </a:ln>
-          <a:effectLst/>
-        </p:spPr>
-        <p:style>
-          <a:lnRef idx="1">
-            <a:schemeClr val="accent1"/>
-          </a:lnRef>
-          <a:fillRef idx="3">
-            <a:schemeClr val="accent1"/>
-          </a:fillRef>
-          <a:effectRef idx="2">
-            <a:schemeClr val="accent1"/>
-          </a:effectRef>
-          <a:fontRef idx="minor">
-            <a:schemeClr val="lt1"/>
-          </a:fontRef>
-        </p:style>
-        <p:txBody>
-          <a:bodyPr rtlCol="0" anchor="ctr"/>
-          <a:lstStyle/>
-          <a:p>
-            <a:pPr algn="ctr"/>
-          </a:p>
-        </p:txBody>
-      </p:sp>
-      <p:sp>
-        <p:nvSpPr>
-          <p:cNvPr id="18" name="Oval 17"/>
-          <p:cNvSpPr/>
-          <p:nvPr/>
-        </p:nvSpPr>
-        <p:spPr>
-          <a:xfrm>
-            <a:off x="804672" y="4005072"/>
-            <a:ext cx="457200" cy="457200"/>
-          </a:xfrm>
-          <a:prstGeom prst="ellipse">
-            <a:avLst/>
-          </a:prstGeom>
-          <a:solidFill>
-            <a:srgbClr val="2E7D6B"/>
-          </a:solidFill>
-          <a:ln>
-            <a:noFill/>
-          </a:ln>
-          <a:effectLst/>
-        </p:spPr>
-        <p:style>
-          <a:lnRef idx="1">
-            <a:schemeClr val="accent1"/>
-          </a:lnRef>
-          <a:fillRef idx="3">
-            <a:schemeClr val="accent1"/>
-          </a:fillRef>
-          <a:effectRef idx="2">
-            <a:schemeClr val="accent1"/>
-          </a:effectRef>
-          <a:fontRef idx="minor">
-            <a:schemeClr val="lt1"/>
-          </a:fontRef>
-        </p:style>
-        <p:txBody>
-          <a:bodyPr rtlCol="0" anchor="ctr"/>
-          <a:lstStyle/>
-          <a:p>
-            <a:pPr algn="ctr"/>
-          </a:p>
-        </p:txBody>
-      </p:sp>
-      <p:sp>
-        <p:nvSpPr>
-          <p:cNvPr id="19" name="TextBox 18"/>
-          <p:cNvSpPr txBox="1"/>
-          <p:nvPr/>
-        </p:nvSpPr>
-        <p:spPr>
-          <a:xfrm>
-            <a:off x="804672" y="4059936"/>
-            <a:ext cx="457200" cy="384048"/>
-          </a:xfrm>
-          <a:prstGeom prst="rect">
-            <a:avLst/>
-          </a:prstGeom>
-          <a:noFill/>
-        </p:spPr>
-        <p:txBody>
-          <a:bodyPr wrap="square" anchor="t" lIns="0" rIns="0" tIns="0" bIns="0">
-            <a:spAutoFit/>
-          </a:bodyPr>
-          <a:lstStyle/>
-          <a:p>
-            <a:pPr algn="ctr"/>
-            <a:r>
-              <a:rPr sz="1600" b="1">
-                <a:solidFill>
-                  <a:srgbClr val="FFFFFF"/>
-                </a:solidFill>
-                <a:latin typeface="微软雅黑"/>
-                <a:ea typeface="微软雅黑"/>
-                <a:cs typeface="微软雅黑"/>
-              </a:rPr>
-              <a:t>4</a:t>
-            </a:r>
-          </a:p>
-        </p:txBody>
-      </p:sp>
-      <p:sp>
-        <p:nvSpPr>
-          <p:cNvPr id="20" name="TextBox 19"/>
-          <p:cNvSpPr txBox="1"/>
-          <p:nvPr/>
-        </p:nvSpPr>
-        <p:spPr>
-          <a:xfrm>
-            <a:off x="1371600" y="3950208"/>
-            <a:ext cx="9997135" cy="484632"/>
-          </a:xfrm>
-          <a:prstGeom prst="rect">
-            <a:avLst/>
-          </a:prstGeom>
-          <a:noFill/>
-        </p:spPr>
-        <p:txBody>
-          <a:bodyPr wrap="square" anchor="t" lIns="0" rIns="0" tIns="0" bIns="0">
-            <a:spAutoFit/>
-          </a:bodyPr>
-          <a:lstStyle/>
-          <a:p>
-            <a:pPr algn="l">
-              <a:lnSpc>
-                <a:spcPct val="110000"/>
-              </a:lnSpc>
-            </a:pPr>
-            <a:r>
-              <a:rPr sz="1600" b="1">
-                <a:solidFill>
-                  <a:srgbClr val="1C2A33"/>
-                </a:solidFill>
-                <a:latin typeface="微软雅黑"/>
-                <a:ea typeface="微软雅黑"/>
-                <a:cs typeface="微软雅黑"/>
-              </a:rPr>
-              <a:t>Step 4 调节网络</a:t>
-            </a:r>
-          </a:p>
-        </p:txBody>
-      </p:sp>
-      <p:sp>
-        <p:nvSpPr>
-          <p:cNvPr id="21" name="Rounded Rectangle 20"/>
-          <p:cNvSpPr/>
-          <p:nvPr/>
-        </p:nvSpPr>
-        <p:spPr>
-          <a:xfrm>
-            <a:off x="640080" y="4663440"/>
-            <a:ext cx="10911535" cy="685800"/>
-          </a:xfrm>
-          <a:prstGeom prst="roundRect">
-            <a:avLst/>
-          </a:prstGeom>
-          <a:solidFill>
-            <a:srgbClr val="FFFFFF"/>
-          </a:solidFill>
-          <a:ln w="22860">
-            <a:solidFill>
-              <a:srgbClr val="2E7D6B"/>
-            </a:solidFill>
-          </a:ln>
-          <a:effectLst/>
-        </p:spPr>
-        <p:style>
-          <a:lnRef idx="1">
-            <a:schemeClr val="accent1"/>
-          </a:lnRef>
-          <a:fillRef idx="3">
-            <a:schemeClr val="accent1"/>
-          </a:fillRef>
-          <a:effectRef idx="2">
-            <a:schemeClr val="accent1"/>
-          </a:effectRef>
-          <a:fontRef idx="minor">
-            <a:schemeClr val="lt1"/>
-          </a:fontRef>
-        </p:style>
-        <p:txBody>
-          <a:bodyPr rtlCol="0" anchor="ctr"/>
-          <a:lstStyle/>
-          <a:p>
-            <a:pPr algn="ctr"/>
-          </a:p>
-        </p:txBody>
-      </p:sp>
-      <p:sp>
-        <p:nvSpPr>
-          <p:cNvPr id="22" name="Oval 21"/>
-          <p:cNvSpPr/>
-          <p:nvPr/>
-        </p:nvSpPr>
-        <p:spPr>
-          <a:xfrm>
-            <a:off x="804672" y="4828032"/>
-            <a:ext cx="457200" cy="457200"/>
-          </a:xfrm>
-          <a:prstGeom prst="ellipse">
-            <a:avLst/>
-          </a:prstGeom>
-          <a:solidFill>
-            <a:srgbClr val="2E7D6B"/>
-          </a:solidFill>
-          <a:ln>
-            <a:noFill/>
-          </a:ln>
-          <a:effectLst/>
-        </p:spPr>
-        <p:style>
-          <a:lnRef idx="1">
-            <a:schemeClr val="accent1"/>
-          </a:lnRef>
-          <a:fillRef idx="3">
-            <a:schemeClr val="accent1"/>
-          </a:fillRef>
-          <a:effectRef idx="2">
-            <a:schemeClr val="accent1"/>
-          </a:effectRef>
-          <a:fontRef idx="minor">
-            <a:schemeClr val="lt1"/>
-          </a:fontRef>
-        </p:style>
-        <p:txBody>
-          <a:bodyPr rtlCol="0" anchor="ctr"/>
-          <a:lstStyle/>
-          <a:p>
-            <a:pPr algn="ctr"/>
-          </a:p>
-        </p:txBody>
-      </p:sp>
-      <p:sp>
-        <p:nvSpPr>
-          <p:cNvPr id="23" name="TextBox 22"/>
-          <p:cNvSpPr txBox="1"/>
-          <p:nvPr/>
-        </p:nvSpPr>
-        <p:spPr>
-          <a:xfrm>
-            <a:off x="804672" y="4882896"/>
-            <a:ext cx="457200" cy="384048"/>
-          </a:xfrm>
-          <a:prstGeom prst="rect">
-            <a:avLst/>
-          </a:prstGeom>
-          <a:noFill/>
-        </p:spPr>
-        <p:txBody>
-          <a:bodyPr wrap="square" anchor="t" lIns="0" rIns="0" tIns="0" bIns="0">
-            <a:spAutoFit/>
-          </a:bodyPr>
-          <a:lstStyle/>
-          <a:p>
-            <a:pPr algn="ctr"/>
-            <a:r>
-              <a:rPr sz="1600" b="1">
-                <a:solidFill>
-                  <a:srgbClr val="FFFFFF"/>
-                </a:solidFill>
-                <a:latin typeface="微软雅黑"/>
-                <a:ea typeface="微软雅黑"/>
-                <a:cs typeface="微软雅黑"/>
-              </a:rPr>
-              <a:t>5</a:t>
-            </a:r>
-          </a:p>
-        </p:txBody>
-      </p:sp>
-      <p:sp>
-        <p:nvSpPr>
-          <p:cNvPr id="24" name="TextBox 23"/>
-          <p:cNvSpPr txBox="1"/>
-          <p:nvPr/>
-        </p:nvSpPr>
-        <p:spPr>
-          <a:xfrm>
-            <a:off x="1371600" y="4773168"/>
-            <a:ext cx="9997135" cy="484632"/>
-          </a:xfrm>
-          <a:prstGeom prst="rect">
-            <a:avLst/>
-          </a:prstGeom>
-          <a:noFill/>
-        </p:spPr>
-        <p:txBody>
-          <a:bodyPr wrap="square" anchor="t" lIns="0" rIns="0" tIns="0" bIns="0">
-            <a:spAutoFit/>
-          </a:bodyPr>
-          <a:lstStyle/>
-          <a:p>
-            <a:pPr algn="l">
-              <a:lnSpc>
-                <a:spcPct val="110000"/>
-              </a:lnSpc>
-            </a:pPr>
-            <a:r>
-              <a:rPr sz="1600" b="1">
-                <a:solidFill>
-                  <a:srgbClr val="1C2A33"/>
-                </a:solidFill>
-                <a:latin typeface="微软雅黑"/>
-                <a:ea typeface="微软雅黑"/>
-                <a:cs typeface="微软雅黑"/>
-              </a:rPr>
-              <a:t>Step 5 稳态意义</a:t>
-            </a:r>
-          </a:p>
-        </p:txBody>
-      </p:sp>
-      <p:sp>
-        <p:nvSpPr>
-          <p:cNvPr id="25" name="Rounded Rectangle 24"/>
-          <p:cNvSpPr/>
-          <p:nvPr/>
-        </p:nvSpPr>
-        <p:spPr>
-          <a:xfrm>
-            <a:off x="640080" y="5486400"/>
-            <a:ext cx="10911535" cy="685800"/>
-          </a:xfrm>
-          <a:prstGeom prst="roundRect">
-            <a:avLst/>
-          </a:prstGeom>
-          <a:solidFill>
-            <a:srgbClr val="FFFFFF"/>
-          </a:solidFill>
-          <a:ln w="22860">
-            <a:solidFill>
-              <a:srgbClr val="2E7D6B"/>
-            </a:solidFill>
-          </a:ln>
-          <a:effectLst/>
-        </p:spPr>
-        <p:style>
-          <a:lnRef idx="1">
-            <a:schemeClr val="accent1"/>
-          </a:lnRef>
-          <a:fillRef idx="3">
-            <a:schemeClr val="accent1"/>
-          </a:fillRef>
-          <a:effectRef idx="2">
-            <a:schemeClr val="accent1"/>
-          </a:effectRef>
-          <a:fontRef idx="minor">
-            <a:schemeClr val="lt1"/>
-          </a:fontRef>
-        </p:style>
-        <p:txBody>
-          <a:bodyPr rtlCol="0" anchor="ctr"/>
-          <a:lstStyle/>
-          <a:p>
-            <a:pPr algn="ctr"/>
-          </a:p>
-        </p:txBody>
-      </p:sp>
-      <p:sp>
-        <p:nvSpPr>
-          <p:cNvPr id="26" name="Oval 25"/>
-          <p:cNvSpPr/>
-          <p:nvPr/>
-        </p:nvSpPr>
-        <p:spPr>
-          <a:xfrm>
-            <a:off x="804672" y="5650992"/>
-            <a:ext cx="457200" cy="457200"/>
-          </a:xfrm>
-          <a:prstGeom prst="ellipse">
-            <a:avLst/>
-          </a:prstGeom>
-          <a:solidFill>
-            <a:srgbClr val="2E7D6B"/>
-          </a:solidFill>
-          <a:ln>
-            <a:noFill/>
-          </a:ln>
-          <a:effectLst/>
-        </p:spPr>
-        <p:style>
-          <a:lnRef idx="1">
-            <a:schemeClr val="accent1"/>
-          </a:lnRef>
-          <a:fillRef idx="3">
-            <a:schemeClr val="accent1"/>
-          </a:fillRef>
-          <a:effectRef idx="2">
-            <a:schemeClr val="accent1"/>
-          </a:effectRef>
-          <a:fontRef idx="minor">
-            <a:schemeClr val="lt1"/>
-          </a:fontRef>
-        </p:style>
-        <p:txBody>
-          <a:bodyPr rtlCol="0" anchor="ctr"/>
-          <a:lstStyle/>
-          <a:p>
-            <a:pPr algn="ctr"/>
-          </a:p>
-        </p:txBody>
-      </p:sp>
-      <p:sp>
-        <p:nvSpPr>
-          <p:cNvPr id="27" name="TextBox 26"/>
-          <p:cNvSpPr txBox="1"/>
-          <p:nvPr/>
-        </p:nvSpPr>
-        <p:spPr>
-          <a:xfrm>
-            <a:off x="804672" y="5705856"/>
-            <a:ext cx="457200" cy="384048"/>
-          </a:xfrm>
-          <a:prstGeom prst="rect">
-            <a:avLst/>
-          </a:prstGeom>
-          <a:noFill/>
-        </p:spPr>
-        <p:txBody>
-          <a:bodyPr wrap="square" anchor="t" lIns="0" rIns="0" tIns="0" bIns="0">
-            <a:spAutoFit/>
-          </a:bodyPr>
-          <a:lstStyle/>
-          <a:p>
-            <a:pPr algn="ctr"/>
-            <a:r>
-              <a:rPr sz="1600" b="1">
-                <a:solidFill>
-                  <a:srgbClr val="FFFFFF"/>
-                </a:solidFill>
-                <a:latin typeface="微软雅黑"/>
-                <a:ea typeface="微软雅黑"/>
-                <a:cs typeface="微软雅黑"/>
-              </a:rPr>
-              <a:t>6</a:t>
-            </a:r>
-          </a:p>
-        </p:txBody>
-      </p:sp>
-      <p:sp>
-        <p:nvSpPr>
-          <p:cNvPr id="28" name="TextBox 27"/>
-          <p:cNvSpPr txBox="1"/>
-          <p:nvPr/>
-        </p:nvSpPr>
-        <p:spPr>
-          <a:xfrm>
-            <a:off x="1371600" y="5596128"/>
-            <a:ext cx="9997135" cy="484632"/>
-          </a:xfrm>
-          <a:prstGeom prst="rect">
-            <a:avLst/>
-          </a:prstGeom>
-          <a:noFill/>
-        </p:spPr>
-        <p:txBody>
-          <a:bodyPr wrap="square" anchor="t" lIns="0" rIns="0" tIns="0" bIns="0">
-            <a:spAutoFit/>
-          </a:bodyPr>
-          <a:lstStyle/>
-          <a:p>
-            <a:pPr algn="l">
-              <a:lnSpc>
-                <a:spcPct val="110000"/>
-              </a:lnSpc>
-            </a:pPr>
-            <a:r>
-              <a:rPr sz="1600" b="1">
-                <a:solidFill>
-                  <a:srgbClr val="1C2A33"/>
-                </a:solidFill>
-                <a:latin typeface="微软雅黑"/>
-                <a:ea typeface="微软雅黑"/>
-                <a:cs typeface="微软雅黑"/>
-              </a:rPr>
-              <a:t>Step 6 练习+作业</a:t>
-            </a:r>
-          </a:p>
-        </p:txBody>
-      </p:sp>
-      <p:sp>
-        <p:nvSpPr>
-          <p:cNvPr id="29" name="TextBox 28"/>
+              <a:t>④ 实例法(失调)。</a:t>
+            </a:r>
+          </a:p>
+        </p:txBody>
+      </p:sp>
+      <p:sp>
+        <p:nvSpPr>
+          <p:cNvPr id="22" name="TextBox 21"/>
           <p:cNvSpPr txBox="1"/>
           <p:nvPr/>
         </p:nvSpPr>
@@ -6717,7 +6919,7 @@
                 <a:ea typeface="微软雅黑"/>
                 <a:cs typeface="微软雅黑"/>
               </a:rPr>
-              <a:t>易混易错</a:t>
+              <a:t>难点</a:t>
             </a:r>
           </a:p>
         </p:txBody>
@@ -6768,14 +6970,55 @@
       </p:sp>
       <p:sp>
         <p:nvSpPr>
-          <p:cNvPr id="5" name="Rounded Rectangle 4"/>
+          <p:cNvPr id="5" name="TextBox 4"/>
+          <p:cNvSpPr txBox="1"/>
+          <p:nvPr/>
+        </p:nvSpPr>
+        <p:spPr>
+          <a:xfrm>
+            <a:off x="640080" y="1325880"/>
+            <a:ext cx="10911535" cy="548640"/>
+          </a:xfrm>
+          <a:prstGeom prst="rect">
+            <a:avLst/>
+          </a:prstGeom>
+          <a:noFill/>
+        </p:spPr>
+        <p:txBody>
+          <a:bodyPr wrap="square" anchor="t" lIns="0" rIns="0" tIns="0" bIns="0">
+            <a:spAutoFit/>
+          </a:bodyPr>
+          <a:lstStyle/>
+          <a:p>
+            <a:pPr algn="l">
+              <a:lnSpc>
+                <a:spcPct val="130000"/>
+              </a:lnSpc>
+            </a:pPr>
+            <a:r>
+              <a:rPr sz="2800" b="1">
+                <a:solidFill>
+                  <a:srgbClr val="1C2A33"/>
+                </a:solidFill>
+                <a:latin typeface="楷体"/>
+                <a:ea typeface="楷体"/>
+                <a:cs typeface="楷体"/>
+              </a:rPr>
+              <a:t>易卡之处 · 怎么破</a:t>
+            </a:r>
+          </a:p>
+        </p:txBody>
+      </p:sp>
+      <p:sp>
+        <p:nvSpPr>
+          <p:cNvPr id="6" name="Rounded Rectangle 5"/>
           <p:cNvSpPr/>
           <p:nvPr/>
         </p:nvSpPr>
         <p:spPr>
           <a:xfrm>
-            <a:off x="640080" y="1417320"/>
-            <a:ext cx="5349240" cy="2057400"/>
+            <a:off x="640080" y="2194560"/>
+            <a:ext cx="3393338" cy="3840480"/>
           </a:xfrm>
           <a:prstGeom prst="roundRect">
             <a:avLst/>
@@ -6783,7 +7026,7 @@
           <a:solidFill>
             <a:srgbClr val="FFFFFF"/>
           </a:solidFill>
-          <a:ln w="22860">
+          <a:ln w="20320">
             <a:solidFill>
               <a:srgbClr val="B23A2A"/>
             </a:solidFill>
@@ -6814,14 +7057,14 @@
       </p:sp>
       <p:sp>
         <p:nvSpPr>
-          <p:cNvPr id="6" name="Oval 5"/>
+          <p:cNvPr id="7" name="Oval 6"/>
           <p:cNvSpPr/>
           <p:nvPr/>
         </p:nvSpPr>
         <p:spPr>
           <a:xfrm>
-            <a:off x="804672" y="1581912"/>
-            <a:ext cx="457200" cy="457200"/>
+            <a:off x="868680" y="2423160"/>
+            <a:ext cx="548640" cy="548640"/>
           </a:xfrm>
           <a:prstGeom prst="ellipse">
             <a:avLst/>
@@ -6858,14 +7101,14 @@
       </p:sp>
       <p:sp>
         <p:nvSpPr>
-          <p:cNvPr id="7" name="TextBox 6"/>
+          <p:cNvPr id="8" name="TextBox 7"/>
           <p:cNvSpPr txBox="1"/>
           <p:nvPr/>
         </p:nvSpPr>
         <p:spPr>
           <a:xfrm>
-            <a:off x="804672" y="1636776"/>
-            <a:ext cx="457200" cy="384048"/>
+            <a:off x="868680" y="2496312"/>
+            <a:ext cx="548640" cy="384048"/>
           </a:xfrm>
           <a:prstGeom prst="rect">
             <a:avLst/>
@@ -6878,9 +7121,13 @@
           </a:bodyPr>
           <a:lstStyle/>
           <a:p>
-            <a:pPr algn="ctr"/>
-            <a:r>
-              <a:rPr sz="1600" b="1">
+            <a:pPr algn="ctr">
+              <a:lnSpc>
+                <a:spcPct val="120000"/>
+              </a:lnSpc>
+            </a:pPr>
+            <a:r>
+              <a:rPr sz="1800" b="1">
                 <a:solidFill>
                   <a:srgbClr val="FFFFFF"/>
                 </a:solidFill>
@@ -6888,21 +7135,21 @@
                 <a:ea typeface="微软雅黑"/>
                 <a:cs typeface="微软雅黑"/>
               </a:rPr>
-              <a:t>!</a:t>
-            </a:r>
-          </a:p>
-        </p:txBody>
-      </p:sp>
-      <p:sp>
-        <p:nvSpPr>
-          <p:cNvPr id="8" name="TextBox 7"/>
+              <a:t>1</a:t>
+            </a:r>
+          </a:p>
+        </p:txBody>
+      </p:sp>
+      <p:sp>
+        <p:nvSpPr>
+          <p:cNvPr id="9" name="TextBox 8"/>
           <p:cNvSpPr txBox="1"/>
           <p:nvPr/>
         </p:nvSpPr>
         <p:spPr>
           <a:xfrm>
-            <a:off x="1371600" y="1527048"/>
-            <a:ext cx="4434840" cy="457200"/>
+            <a:off x="1554480" y="2450592"/>
+            <a:ext cx="2296058" cy="640080"/>
           </a:xfrm>
           <a:prstGeom prst="rect">
             <a:avLst/>
@@ -6917,52 +7164,11 @@
           <a:p>
             <a:pPr algn="l">
               <a:lnSpc>
-                <a:spcPct val="110000"/>
+                <a:spcPct val="130000"/>
               </a:lnSpc>
             </a:pPr>
             <a:r>
-              <a:rPr sz="1600" b="1">
-                <a:solidFill>
-                  <a:srgbClr val="1C2A33"/>
-                </a:solidFill>
-                <a:latin typeface="微软雅黑"/>
-                <a:ea typeface="微软雅黑"/>
-                <a:cs typeface="微软雅黑"/>
-              </a:rPr>
-              <a:t/>
-            </a:r>
-          </a:p>
-        </p:txBody>
-      </p:sp>
-      <p:sp>
-        <p:nvSpPr>
-          <p:cNvPr id="9" name="TextBox 8"/>
-          <p:cNvSpPr txBox="1"/>
-          <p:nvPr/>
-        </p:nvSpPr>
-        <p:spPr>
-          <a:xfrm>
-            <a:off x="1371600" y="1965960"/>
-            <a:ext cx="4434840" cy="1417320"/>
-          </a:xfrm>
-          <a:prstGeom prst="rect">
-            <a:avLst/>
-          </a:prstGeom>
-          <a:noFill/>
-        </p:spPr>
-        <p:txBody>
-          <a:bodyPr wrap="square" anchor="t" lIns="0" rIns="0" tIns="0" bIns="0">
-            <a:spAutoFit/>
-          </a:bodyPr>
-          <a:lstStyle/>
-          <a:p>
-            <a:pPr algn="l">
-              <a:lnSpc>
-                <a:spcPct val="128000"/>
-              </a:lnSpc>
-            </a:pPr>
-            <a:r>
-              <a:rPr sz="1400" b="0">
+              <a:rPr sz="1550" b="1">
                 <a:solidFill>
                   <a:srgbClr val="1C2A33"/>
                 </a:solidFill>
@@ -6970,21 +7176,62 @@
                 <a:ea typeface="楷体"/>
                 <a:cs typeface="楷体"/>
               </a:rPr>
-              <a:t>① 相对稳定。原因：不是绝对不变而是动态范围，易误为恒定，需强调。</a:t>
-            </a:r>
-          </a:p>
-        </p:txBody>
-      </p:sp>
-      <p:sp>
-        <p:nvSpPr>
-          <p:cNvPr id="10" name="Rounded Rectangle 9"/>
+              <a:t>① 相对稳定</a:t>
+            </a:r>
+          </a:p>
+        </p:txBody>
+      </p:sp>
+      <p:sp>
+        <p:nvSpPr>
+          <p:cNvPr id="10" name="TextBox 9"/>
+          <p:cNvSpPr txBox="1"/>
+          <p:nvPr/>
+        </p:nvSpPr>
+        <p:spPr>
+          <a:xfrm>
+            <a:off x="914400" y="3154680"/>
+            <a:ext cx="2844698" cy="2743200"/>
+          </a:xfrm>
+          <a:prstGeom prst="rect">
+            <a:avLst/>
+          </a:prstGeom>
+          <a:noFill/>
+        </p:spPr>
+        <p:txBody>
+          <a:bodyPr wrap="square" anchor="t" lIns="0" rIns="0" tIns="0" bIns="0">
+            <a:spAutoFit/>
+          </a:bodyPr>
+          <a:lstStyle/>
+          <a:p>
+            <a:pPr algn="l">
+              <a:lnSpc>
+                <a:spcPct val="150000"/>
+              </a:lnSpc>
+            </a:pPr>
+            <a:r>
+              <a:rPr sz="1300" b="0">
+                <a:solidFill>
+                  <a:srgbClr val="1C2A33"/>
+                </a:solidFill>
+                <a:latin typeface="楷体"/>
+                <a:ea typeface="楷体"/>
+                <a:cs typeface="楷体"/>
+              </a:rPr>
+              <a:t>原因：不是绝对不变而是动态范围，易误为恒定，需强调。</a:t>
+            </a:r>
+          </a:p>
+        </p:txBody>
+      </p:sp>
+      <p:sp>
+        <p:nvSpPr>
+          <p:cNvPr id="11" name="Rounded Rectangle 10"/>
           <p:cNvSpPr/>
           <p:nvPr/>
         </p:nvSpPr>
         <p:spPr>
           <a:xfrm>
-            <a:off x="6263640" y="1417320"/>
-            <a:ext cx="5349240" cy="2057400"/>
+            <a:off x="4399178" y="2194560"/>
+            <a:ext cx="3393338" cy="3840480"/>
           </a:xfrm>
           <a:prstGeom prst="roundRect">
             <a:avLst/>
@@ -6992,9 +7239,9 @@
           <a:solidFill>
             <a:srgbClr val="FFFFFF"/>
           </a:solidFill>
-          <a:ln w="22860">
+          <a:ln w="20320">
             <a:solidFill>
-              <a:srgbClr val="B23A2A"/>
+              <a:srgbClr val="2E7D6B"/>
             </a:solidFill>
           </a:ln>
           <a:effectLst/>
@@ -7023,20 +7270,20 @@
       </p:sp>
       <p:sp>
         <p:nvSpPr>
-          <p:cNvPr id="11" name="Oval 10"/>
+          <p:cNvPr id="12" name="Oval 11"/>
           <p:cNvSpPr/>
           <p:nvPr/>
         </p:nvSpPr>
         <p:spPr>
           <a:xfrm>
-            <a:off x="6428232" y="1581912"/>
-            <a:ext cx="457200" cy="457200"/>
+            <a:off x="4627778" y="2423160"/>
+            <a:ext cx="548640" cy="548640"/>
           </a:xfrm>
           <a:prstGeom prst="ellipse">
             <a:avLst/>
           </a:prstGeom>
           <a:solidFill>
-            <a:srgbClr val="B23A2A"/>
+            <a:srgbClr val="2E7D6B"/>
           </a:solidFill>
           <a:ln>
             <a:noFill/>
@@ -7067,14 +7314,14 @@
       </p:sp>
       <p:sp>
         <p:nvSpPr>
-          <p:cNvPr id="12" name="TextBox 11"/>
+          <p:cNvPr id="13" name="TextBox 12"/>
           <p:cNvSpPr txBox="1"/>
           <p:nvPr/>
         </p:nvSpPr>
         <p:spPr>
           <a:xfrm>
-            <a:off x="6428232" y="1636776"/>
-            <a:ext cx="457200" cy="384048"/>
+            <a:off x="4627778" y="2496312"/>
+            <a:ext cx="548640" cy="384048"/>
           </a:xfrm>
           <a:prstGeom prst="rect">
             <a:avLst/>
@@ -7087,9 +7334,13 @@
           </a:bodyPr>
           <a:lstStyle/>
           <a:p>
-            <a:pPr algn="ctr"/>
-            <a:r>
-              <a:rPr sz="1600" b="1">
+            <a:pPr algn="ctr">
+              <a:lnSpc>
+                <a:spcPct val="120000"/>
+              </a:lnSpc>
+            </a:pPr>
+            <a:r>
+              <a:rPr sz="1800" b="1">
                 <a:solidFill>
                   <a:srgbClr val="FFFFFF"/>
                 </a:solidFill>
@@ -7097,21 +7348,21 @@
                 <a:ea typeface="微软雅黑"/>
                 <a:cs typeface="微软雅黑"/>
               </a:rPr>
-              <a:t>!</a:t>
-            </a:r>
-          </a:p>
-        </p:txBody>
-      </p:sp>
-      <p:sp>
-        <p:nvSpPr>
-          <p:cNvPr id="13" name="TextBox 12"/>
+              <a:t>2</a:t>
+            </a:r>
+          </a:p>
+        </p:txBody>
+      </p:sp>
+      <p:sp>
+        <p:nvSpPr>
+          <p:cNvPr id="14" name="TextBox 13"/>
           <p:cNvSpPr txBox="1"/>
           <p:nvPr/>
         </p:nvSpPr>
         <p:spPr>
           <a:xfrm>
-            <a:off x="6995160" y="1527048"/>
-            <a:ext cx="4434840" cy="457200"/>
+            <a:off x="5313578" y="2450592"/>
+            <a:ext cx="2296058" cy="640080"/>
           </a:xfrm>
           <a:prstGeom prst="rect">
             <a:avLst/>
@@ -7126,52 +7377,11 @@
           <a:p>
             <a:pPr algn="l">
               <a:lnSpc>
-                <a:spcPct val="110000"/>
+                <a:spcPct val="130000"/>
               </a:lnSpc>
             </a:pPr>
             <a:r>
-              <a:rPr sz="1600" b="1">
-                <a:solidFill>
-                  <a:srgbClr val="1C2A33"/>
-                </a:solidFill>
-                <a:latin typeface="微软雅黑"/>
-                <a:ea typeface="微软雅黑"/>
-                <a:cs typeface="微软雅黑"/>
-              </a:rPr>
-              <a:t/>
-            </a:r>
-          </a:p>
-        </p:txBody>
-      </p:sp>
-      <p:sp>
-        <p:nvSpPr>
-          <p:cNvPr id="14" name="TextBox 13"/>
-          <p:cNvSpPr txBox="1"/>
-          <p:nvPr/>
-        </p:nvSpPr>
-        <p:spPr>
-          <a:xfrm>
-            <a:off x="6995160" y="1965960"/>
-            <a:ext cx="4434840" cy="1417320"/>
-          </a:xfrm>
-          <a:prstGeom prst="rect">
-            <a:avLst/>
-          </a:prstGeom>
-          <a:noFill/>
-        </p:spPr>
-        <p:txBody>
-          <a:bodyPr wrap="square" anchor="t" lIns="0" rIns="0" tIns="0" bIns="0">
-            <a:spAutoFit/>
-          </a:bodyPr>
-          <a:lstStyle/>
-          <a:p>
-            <a:pPr algn="l">
-              <a:lnSpc>
-                <a:spcPct val="128000"/>
-              </a:lnSpc>
-            </a:pPr>
-            <a:r>
-              <a:rPr sz="1400" b="0">
+              <a:rPr sz="1550" b="1">
                 <a:solidFill>
                   <a:srgbClr val="1C2A33"/>
                 </a:solidFill>
@@ -7179,21 +7389,62 @@
                 <a:ea typeface="楷体"/>
                 <a:cs typeface="楷体"/>
               </a:rPr>
-              <a:t>② 调节网络。原因：三类调节共同维持，易漏其一，需列。</a:t>
-            </a:r>
-          </a:p>
-        </p:txBody>
-      </p:sp>
-      <p:sp>
-        <p:nvSpPr>
-          <p:cNvPr id="15" name="Rounded Rectangle 14"/>
+              <a:t>② 调节网络</a:t>
+            </a:r>
+          </a:p>
+        </p:txBody>
+      </p:sp>
+      <p:sp>
+        <p:nvSpPr>
+          <p:cNvPr id="15" name="TextBox 14"/>
+          <p:cNvSpPr txBox="1"/>
+          <p:nvPr/>
+        </p:nvSpPr>
+        <p:spPr>
+          <a:xfrm>
+            <a:off x="4673498" y="3154680"/>
+            <a:ext cx="2844698" cy="2743200"/>
+          </a:xfrm>
+          <a:prstGeom prst="rect">
+            <a:avLst/>
+          </a:prstGeom>
+          <a:noFill/>
+        </p:spPr>
+        <p:txBody>
+          <a:bodyPr wrap="square" anchor="t" lIns="0" rIns="0" tIns="0" bIns="0">
+            <a:spAutoFit/>
+          </a:bodyPr>
+          <a:lstStyle/>
+          <a:p>
+            <a:pPr algn="l">
+              <a:lnSpc>
+                <a:spcPct val="150000"/>
+              </a:lnSpc>
+            </a:pPr>
+            <a:r>
+              <a:rPr sz="1300" b="0">
+                <a:solidFill>
+                  <a:srgbClr val="1C2A33"/>
+                </a:solidFill>
+                <a:latin typeface="楷体"/>
+                <a:ea typeface="楷体"/>
+                <a:cs typeface="楷体"/>
+              </a:rPr>
+              <a:t>原因：三类调节共同维持，易漏其一，需列。</a:t>
+            </a:r>
+          </a:p>
+        </p:txBody>
+      </p:sp>
+      <p:sp>
+        <p:nvSpPr>
+          <p:cNvPr id="16" name="Rounded Rectangle 15"/>
           <p:cNvSpPr/>
           <p:nvPr/>
         </p:nvSpPr>
         <p:spPr>
           <a:xfrm>
-            <a:off x="640080" y="3703320"/>
-            <a:ext cx="5349240" cy="2057400"/>
+            <a:off x="8158276" y="2194560"/>
+            <a:ext cx="3393338" cy="3840480"/>
           </a:xfrm>
           <a:prstGeom prst="roundRect">
             <a:avLst/>
@@ -7201,9 +7452,9 @@
           <a:solidFill>
             <a:srgbClr val="FFFFFF"/>
           </a:solidFill>
-          <a:ln w="22860">
+          <a:ln w="20320">
             <a:solidFill>
-              <a:srgbClr val="B23A2A"/>
+              <a:srgbClr val="C8A86B"/>
             </a:solidFill>
           </a:ln>
           <a:effectLst/>
@@ -7232,20 +7483,20 @@
       </p:sp>
       <p:sp>
         <p:nvSpPr>
-          <p:cNvPr id="16" name="Oval 15"/>
+          <p:cNvPr id="17" name="Oval 16"/>
           <p:cNvSpPr/>
           <p:nvPr/>
         </p:nvSpPr>
         <p:spPr>
           <a:xfrm>
-            <a:off x="804672" y="3867912"/>
-            <a:ext cx="457200" cy="457200"/>
+            <a:off x="8386876" y="2423160"/>
+            <a:ext cx="548640" cy="548640"/>
           </a:xfrm>
           <a:prstGeom prst="ellipse">
             <a:avLst/>
           </a:prstGeom>
           <a:solidFill>
-            <a:srgbClr val="B23A2A"/>
+            <a:srgbClr val="C8A86B"/>
           </a:solidFill>
           <a:ln>
             <a:noFill/>
@@ -7276,14 +7527,14 @@
       </p:sp>
       <p:sp>
         <p:nvSpPr>
-          <p:cNvPr id="17" name="TextBox 16"/>
+          <p:cNvPr id="18" name="TextBox 17"/>
           <p:cNvSpPr txBox="1"/>
           <p:nvPr/>
         </p:nvSpPr>
         <p:spPr>
           <a:xfrm>
-            <a:off x="804672" y="3922776"/>
-            <a:ext cx="457200" cy="384048"/>
+            <a:off x="8386876" y="2496312"/>
+            <a:ext cx="548640" cy="384048"/>
           </a:xfrm>
           <a:prstGeom prst="rect">
             <a:avLst/>
@@ -7296,9 +7547,13 @@
           </a:bodyPr>
           <a:lstStyle/>
           <a:p>
-            <a:pPr algn="ctr"/>
-            <a:r>
-              <a:rPr sz="1600" b="1">
+            <a:pPr algn="ctr">
+              <a:lnSpc>
+                <a:spcPct val="120000"/>
+              </a:lnSpc>
+            </a:pPr>
+            <a:r>
+              <a:rPr sz="1800" b="1">
                 <a:solidFill>
                   <a:srgbClr val="FFFFFF"/>
                 </a:solidFill>
@@ -7306,21 +7561,21 @@
                 <a:ea typeface="微软雅黑"/>
                 <a:cs typeface="微软雅黑"/>
               </a:rPr>
-              <a:t>!</a:t>
-            </a:r>
-          </a:p>
-        </p:txBody>
-      </p:sp>
-      <p:sp>
-        <p:nvSpPr>
-          <p:cNvPr id="18" name="TextBox 17"/>
+              <a:t>3</a:t>
+            </a:r>
+          </a:p>
+        </p:txBody>
+      </p:sp>
+      <p:sp>
+        <p:nvSpPr>
+          <p:cNvPr id="19" name="TextBox 18"/>
           <p:cNvSpPr txBox="1"/>
           <p:nvPr/>
         </p:nvSpPr>
         <p:spPr>
           <a:xfrm>
-            <a:off x="1371600" y="3813048"/>
-            <a:ext cx="4434840" cy="457200"/>
+            <a:off x="9072676" y="2450592"/>
+            <a:ext cx="2296058" cy="640080"/>
           </a:xfrm>
           <a:prstGeom prst="rect">
             <a:avLst/>
@@ -7335,52 +7590,11 @@
           <a:p>
             <a:pPr algn="l">
               <a:lnSpc>
-                <a:spcPct val="110000"/>
+                <a:spcPct val="130000"/>
               </a:lnSpc>
             </a:pPr>
             <a:r>
-              <a:rPr sz="1600" b="1">
-                <a:solidFill>
-                  <a:srgbClr val="1C2A33"/>
-                </a:solidFill>
-                <a:latin typeface="微软雅黑"/>
-                <a:ea typeface="微软雅黑"/>
-                <a:cs typeface="微软雅黑"/>
-              </a:rPr>
-              <a:t/>
-            </a:r>
-          </a:p>
-        </p:txBody>
-      </p:sp>
-      <p:sp>
-        <p:nvSpPr>
-          <p:cNvPr id="19" name="TextBox 18"/>
-          <p:cNvSpPr txBox="1"/>
-          <p:nvPr/>
-        </p:nvSpPr>
-        <p:spPr>
-          <a:xfrm>
-            <a:off x="1371600" y="4251960"/>
-            <a:ext cx="4434840" cy="1417320"/>
-          </a:xfrm>
-          <a:prstGeom prst="rect">
-            <a:avLst/>
-          </a:prstGeom>
-          <a:noFill/>
-        </p:spPr>
-        <p:txBody>
-          <a:bodyPr wrap="square" anchor="t" lIns="0" rIns="0" tIns="0" bIns="0">
-            <a:spAutoFit/>
-          </a:bodyPr>
-          <a:lstStyle/>
-          <a:p>
-            <a:pPr algn="l">
-              <a:lnSpc>
-                <a:spcPct val="128000"/>
-              </a:lnSpc>
-            </a:pPr>
-            <a:r>
-              <a:rPr sz="1200" b="0">
+              <a:rPr sz="1550" b="1">
                 <a:solidFill>
                   <a:srgbClr val="1C2A33"/>
                 </a:solidFill>
@@ -7388,7 +7602,7 @@
                 <a:ea typeface="楷体"/>
                 <a:cs typeface="楷体"/>
               </a:rPr>
-              <a:t>③ 理化指标。原因：渗透压（Na+/Cl-）、pH(7.35-7.45)、温度(37℃)维持机制，需点。</a:t>
+              <a:t>③ 理化指标</a:t>
             </a:r>
           </a:p>
         </p:txBody>
@@ -7396,6 +7610,47 @@
       <p:sp>
         <p:nvSpPr>
           <p:cNvPr id="20" name="TextBox 19"/>
+          <p:cNvSpPr txBox="1"/>
+          <p:nvPr/>
+        </p:nvSpPr>
+        <p:spPr>
+          <a:xfrm>
+            <a:off x="8432596" y="3154680"/>
+            <a:ext cx="2844698" cy="2743200"/>
+          </a:xfrm>
+          <a:prstGeom prst="rect">
+            <a:avLst/>
+          </a:prstGeom>
+          <a:noFill/>
+        </p:spPr>
+        <p:txBody>
+          <a:bodyPr wrap="square" anchor="t" lIns="0" rIns="0" tIns="0" bIns="0">
+            <a:spAutoFit/>
+          </a:bodyPr>
+          <a:lstStyle/>
+          <a:p>
+            <a:pPr algn="l">
+              <a:lnSpc>
+                <a:spcPct val="150000"/>
+              </a:lnSpc>
+            </a:pPr>
+            <a:r>
+              <a:rPr sz="1300" b="0">
+                <a:solidFill>
+                  <a:srgbClr val="1C2A33"/>
+                </a:solidFill>
+                <a:latin typeface="楷体"/>
+                <a:ea typeface="楷体"/>
+                <a:cs typeface="楷体"/>
+              </a:rPr>
+              <a:t>原因：渗透压（Na+/Cl-）、pH(7.35-7.45)、温度(37℃)维持机制，需点。</a:t>
+            </a:r>
+          </a:p>
+        </p:txBody>
+      </p:sp>
+      <p:sp>
+        <p:nvSpPr>
+          <p:cNvPr id="21" name="TextBox 20"/>
           <p:cNvSpPr txBox="1"/>
           <p:nvPr/>
         </p:nvSpPr>
@@ -7522,13 +7777,13 @@
             <a:r>
               <a:rPr sz="1300" b="1">
                 <a:solidFill>
-                  <a:srgbClr val="C8A86B"/>
+                  <a:srgbClr val="B23A2A"/>
                 </a:solidFill>
                 <a:latin typeface="微软雅黑"/>
                 <a:ea typeface="微软雅黑"/>
                 <a:cs typeface="微软雅黑"/>
               </a:rPr>
-              <a:t>要点板书</a:t>
+              <a:t>板书精华</a:t>
             </a:r>
           </a:p>
         </p:txBody>
@@ -7548,7 +7803,7 @@
             <a:avLst/>
           </a:prstGeom>
           <a:solidFill>
-            <a:srgbClr val="C8A86B"/>
+            <a:srgbClr val="B23A2A"/>
           </a:solidFill>
           <a:ln>
             <a:noFill/>
@@ -7579,24 +7834,65 @@
       </p:sp>
       <p:sp>
         <p:nvSpPr>
-          <p:cNvPr id="5" name="Rounded Rectangle 4"/>
+          <p:cNvPr id="5" name="TextBox 4"/>
+          <p:cNvSpPr txBox="1"/>
+          <p:nvPr/>
+        </p:nvSpPr>
+        <p:spPr>
+          <a:xfrm>
+            <a:off x="640080" y="1325880"/>
+            <a:ext cx="10911535" cy="548640"/>
+          </a:xfrm>
+          <a:prstGeom prst="rect">
+            <a:avLst/>
+          </a:prstGeom>
+          <a:noFill/>
+        </p:spPr>
+        <p:txBody>
+          <a:bodyPr wrap="square" anchor="t" lIns="0" rIns="0" tIns="0" bIns="0">
+            <a:spAutoFit/>
+          </a:bodyPr>
+          <a:lstStyle/>
+          <a:p>
+            <a:pPr algn="l">
+              <a:lnSpc>
+                <a:spcPct val="130000"/>
+              </a:lnSpc>
+            </a:pPr>
+            <a:r>
+              <a:rPr sz="2800" b="1">
+                <a:solidFill>
+                  <a:srgbClr val="1C2A33"/>
+                </a:solidFill>
+                <a:latin typeface="楷体"/>
+                <a:ea typeface="楷体"/>
+                <a:cs typeface="楷体"/>
+              </a:rPr>
+              <a:t>一页速记 · 知识骨架</a:t>
+            </a:r>
+          </a:p>
+        </p:txBody>
+      </p:sp>
+      <p:sp>
+        <p:nvSpPr>
+          <p:cNvPr id="6" name="Rounded Rectangle 5"/>
           <p:cNvSpPr/>
           <p:nvPr/>
         </p:nvSpPr>
         <p:spPr>
           <a:xfrm>
-            <a:off x="640080" y="1417320"/>
-            <a:ext cx="10911535" cy="5394960"/>
+            <a:off x="640080" y="2011680"/>
+            <a:ext cx="10911535" cy="4389120"/>
           </a:xfrm>
           <a:prstGeom prst="roundRect">
             <a:avLst/>
           </a:prstGeom>
           <a:solidFill>
-            <a:srgbClr val="FFFFFF"/>
+            <a:srgbClr val="E7DFD2"/>
           </a:solidFill>
-          <a:ln w="25400">
+          <a:ln w="15240">
             <a:solidFill>
-              <a:srgbClr val="C8A86B"/>
+              <a:srgbClr val="6B6258"/>
             </a:solidFill>
           </a:ln>
           <a:effectLst/>
@@ -7625,14 +7921,14 @@
       </p:sp>
       <p:sp>
         <p:nvSpPr>
-          <p:cNvPr id="6" name="TextBox 5"/>
+          <p:cNvPr id="7" name="TextBox 6"/>
           <p:cNvSpPr txBox="1"/>
           <p:nvPr/>
         </p:nvSpPr>
         <p:spPr>
           <a:xfrm>
-            <a:off x="914400" y="1554480"/>
-            <a:ext cx="10362895" cy="5120640"/>
+            <a:off x="1005840" y="2240280"/>
+            <a:ext cx="10180015" cy="3931920"/>
           </a:xfrm>
           <a:prstGeom prst="rect">
             <a:avLst/>
@@ -7647,41 +7943,260 @@
           <a:p>
             <a:pPr algn="l">
               <a:lnSpc>
-                <a:spcPct val="110000"/>
+                <a:spcPct val="135000"/>
               </a:lnSpc>
               <a:spcAft>
-                <a:spcPts val="100"/>
+                <a:spcPts val="500"/>
               </a:spcAft>
             </a:pPr>
             <a:r>
-              <a:rPr sz="1300" b="0">
+              <a:rPr sz="1400" b="0">
                 <a:solidFill>
                   <a:srgbClr val="1C2A33"/>
                 </a:solidFill>
-                <a:latin typeface="微软雅黑"/>
-                <a:ea typeface="微软雅黑"/>
-                <a:cs typeface="微软雅黑"/>
+                <a:latin typeface="楷体"/>
+                <a:ea typeface="楷体"/>
+                <a:cs typeface="楷体"/>
               </a:rPr>
-              <a:t>┌── 内环境稳态 ──┐
-│ 稳态:理化性质│
-│ 相对稳定 │
-│ (动态平衡) │
-│ 指标:渗透压 │
-│ pH7.35-45 │
-│ 温度37℃ │
-│ 调节:神经- │
-│ 体液-免疫 │
-│ 网络 │
-│ 意义:正常生│
-│ 命活动前提 │
-└────────────┘</a:t>
-            </a:r>
-          </a:p>
-        </p:txBody>
-      </p:sp>
-      <p:sp>
-        <p:nvSpPr>
-          <p:cNvPr id="7" name="TextBox 6"/>
+              <a:t>内环境稳态</a:t>
+            </a:r>
+          </a:p>
+          <a:p>
+            <a:pPr algn="l">
+              <a:lnSpc>
+                <a:spcPct val="135000"/>
+              </a:lnSpc>
+              <a:spcAft>
+                <a:spcPts val="500"/>
+              </a:spcAft>
+            </a:pPr>
+            <a:r>
+              <a:rPr sz="1400" b="0">
+                <a:solidFill>
+                  <a:srgbClr val="1C2A33"/>
+                </a:solidFill>
+                <a:latin typeface="楷体"/>
+                <a:ea typeface="楷体"/>
+                <a:cs typeface="楷体"/>
+              </a:rPr>
+              <a:t>稳态:理化性质</a:t>
+            </a:r>
+          </a:p>
+          <a:p>
+            <a:pPr algn="l">
+              <a:lnSpc>
+                <a:spcPct val="135000"/>
+              </a:lnSpc>
+              <a:spcAft>
+                <a:spcPts val="500"/>
+              </a:spcAft>
+            </a:pPr>
+            <a:r>
+              <a:rPr sz="1400" b="0">
+                <a:solidFill>
+                  <a:srgbClr val="1C2A33"/>
+                </a:solidFill>
+                <a:latin typeface="楷体"/>
+                <a:ea typeface="楷体"/>
+                <a:cs typeface="楷体"/>
+              </a:rPr>
+              <a:t>相对稳定</a:t>
+            </a:r>
+          </a:p>
+          <a:p>
+            <a:pPr algn="l">
+              <a:lnSpc>
+                <a:spcPct val="135000"/>
+              </a:lnSpc>
+              <a:spcAft>
+                <a:spcPts val="500"/>
+              </a:spcAft>
+            </a:pPr>
+            <a:r>
+              <a:rPr sz="1400" b="0">
+                <a:solidFill>
+                  <a:srgbClr val="1C2A33"/>
+                </a:solidFill>
+                <a:latin typeface="楷体"/>
+                <a:ea typeface="楷体"/>
+                <a:cs typeface="楷体"/>
+              </a:rPr>
+              <a:t>(动态平衡)</a:t>
+            </a:r>
+          </a:p>
+          <a:p>
+            <a:pPr algn="l">
+              <a:lnSpc>
+                <a:spcPct val="135000"/>
+              </a:lnSpc>
+              <a:spcAft>
+                <a:spcPts val="500"/>
+              </a:spcAft>
+            </a:pPr>
+            <a:r>
+              <a:rPr sz="1400" b="0">
+                <a:solidFill>
+                  <a:srgbClr val="1C2A33"/>
+                </a:solidFill>
+                <a:latin typeface="楷体"/>
+                <a:ea typeface="楷体"/>
+                <a:cs typeface="楷体"/>
+              </a:rPr>
+              <a:t>指标:渗透压</a:t>
+            </a:r>
+          </a:p>
+          <a:p>
+            <a:pPr algn="l">
+              <a:lnSpc>
+                <a:spcPct val="135000"/>
+              </a:lnSpc>
+              <a:spcAft>
+                <a:spcPts val="500"/>
+              </a:spcAft>
+            </a:pPr>
+            <a:r>
+              <a:rPr sz="1400" b="0">
+                <a:solidFill>
+                  <a:srgbClr val="1C2A33"/>
+                </a:solidFill>
+                <a:latin typeface="楷体"/>
+                <a:ea typeface="楷体"/>
+                <a:cs typeface="楷体"/>
+              </a:rPr>
+              <a:t>pH7.35-45</a:t>
+            </a:r>
+          </a:p>
+          <a:p>
+            <a:pPr algn="l">
+              <a:lnSpc>
+                <a:spcPct val="135000"/>
+              </a:lnSpc>
+              <a:spcAft>
+                <a:spcPts val="500"/>
+              </a:spcAft>
+            </a:pPr>
+            <a:r>
+              <a:rPr sz="1400" b="0">
+                <a:solidFill>
+                  <a:srgbClr val="1C2A33"/>
+                </a:solidFill>
+                <a:latin typeface="楷体"/>
+                <a:ea typeface="楷体"/>
+                <a:cs typeface="楷体"/>
+              </a:rPr>
+              <a:t>温度37℃</a:t>
+            </a:r>
+          </a:p>
+          <a:p>
+            <a:pPr algn="l">
+              <a:lnSpc>
+                <a:spcPct val="135000"/>
+              </a:lnSpc>
+              <a:spcAft>
+                <a:spcPts val="500"/>
+              </a:spcAft>
+            </a:pPr>
+            <a:r>
+              <a:rPr sz="1400" b="0">
+                <a:solidFill>
+                  <a:srgbClr val="1C2A33"/>
+                </a:solidFill>
+                <a:latin typeface="楷体"/>
+                <a:ea typeface="楷体"/>
+                <a:cs typeface="楷体"/>
+              </a:rPr>
+              <a:t>调节:神经-</a:t>
+            </a:r>
+          </a:p>
+          <a:p>
+            <a:pPr algn="l">
+              <a:lnSpc>
+                <a:spcPct val="135000"/>
+              </a:lnSpc>
+              <a:spcAft>
+                <a:spcPts val="500"/>
+              </a:spcAft>
+            </a:pPr>
+            <a:r>
+              <a:rPr sz="1400" b="0">
+                <a:solidFill>
+                  <a:srgbClr val="1C2A33"/>
+                </a:solidFill>
+                <a:latin typeface="楷体"/>
+                <a:ea typeface="楷体"/>
+                <a:cs typeface="楷体"/>
+              </a:rPr>
+              <a:t>体液-免疫</a:t>
+            </a:r>
+          </a:p>
+          <a:p>
+            <a:pPr algn="l">
+              <a:lnSpc>
+                <a:spcPct val="135000"/>
+              </a:lnSpc>
+              <a:spcAft>
+                <a:spcPts val="500"/>
+              </a:spcAft>
+            </a:pPr>
+            <a:r>
+              <a:rPr sz="1400" b="0">
+                <a:solidFill>
+                  <a:srgbClr val="1C2A33"/>
+                </a:solidFill>
+                <a:latin typeface="楷体"/>
+                <a:ea typeface="楷体"/>
+                <a:cs typeface="楷体"/>
+              </a:rPr>
+              <a:t>网络</a:t>
+            </a:r>
+          </a:p>
+          <a:p>
+            <a:pPr algn="l">
+              <a:lnSpc>
+                <a:spcPct val="135000"/>
+              </a:lnSpc>
+              <a:spcAft>
+                <a:spcPts val="500"/>
+              </a:spcAft>
+            </a:pPr>
+            <a:r>
+              <a:rPr sz="1400" b="0">
+                <a:solidFill>
+                  <a:srgbClr val="1C2A33"/>
+                </a:solidFill>
+                <a:latin typeface="楷体"/>
+                <a:ea typeface="楷体"/>
+                <a:cs typeface="楷体"/>
+              </a:rPr>
+              <a:t>意义:正常生</a:t>
+            </a:r>
+          </a:p>
+          <a:p>
+            <a:pPr algn="l">
+              <a:lnSpc>
+                <a:spcPct val="135000"/>
+              </a:lnSpc>
+              <a:spcAft>
+                <a:spcPts val="500"/>
+              </a:spcAft>
+            </a:pPr>
+            <a:r>
+              <a:rPr sz="1400" b="0">
+                <a:solidFill>
+                  <a:srgbClr val="1C2A33"/>
+                </a:solidFill>
+                <a:latin typeface="楷体"/>
+                <a:ea typeface="楷体"/>
+                <a:cs typeface="楷体"/>
+              </a:rPr>
+              <a:t>命活动前提</a:t>
+            </a:r>
+          </a:p>
+        </p:txBody>
+      </p:sp>
+      <p:sp>
+        <p:nvSpPr>
+          <p:cNvPr id="8" name="TextBox 7"/>
           <p:cNvSpPr txBox="1"/>
           <p:nvPr/>
         </p:nvSpPr>
@@ -7808,13 +8323,13 @@
             <a:r>
               <a:rPr sz="1300" b="1">
                 <a:solidFill>
-                  <a:srgbClr val="2E7D6B"/>
+                  <a:srgbClr val="B23A2A"/>
                 </a:solidFill>
                 <a:latin typeface="微软雅黑"/>
                 <a:ea typeface="微软雅黑"/>
                 <a:cs typeface="微软雅黑"/>
               </a:rPr>
-              <a:t>分层作业</a:t>
+              <a:t>作业</a:t>
             </a:r>
           </a:p>
         </p:txBody>
@@ -7829,6 +8344,309 @@
           <a:xfrm>
             <a:off x="640080" y="1097280"/>
             <a:ext cx="822960" cy="30480"/>
+          </a:xfrm>
+          <a:prstGeom prst="rect">
+            <a:avLst/>
+          </a:prstGeom>
+          <a:solidFill>
+            <a:srgbClr val="B23A2A"/>
+          </a:solidFill>
+          <a:ln>
+            <a:noFill/>
+          </a:ln>
+          <a:effectLst/>
+        </p:spPr>
+        <p:style>
+          <a:lnRef idx="1">
+            <a:schemeClr val="accent1"/>
+          </a:lnRef>
+          <a:fillRef idx="3">
+            <a:schemeClr val="accent1"/>
+          </a:fillRef>
+          <a:effectRef idx="2">
+            <a:schemeClr val="accent1"/>
+          </a:effectRef>
+          <a:fontRef idx="minor">
+            <a:schemeClr val="lt1"/>
+          </a:fontRef>
+        </p:style>
+        <p:txBody>
+          <a:bodyPr rtlCol="0" anchor="ctr"/>
+          <a:lstStyle/>
+          <a:p>
+            <a:pPr algn="ctr"/>
+          </a:p>
+        </p:txBody>
+      </p:sp>
+      <p:sp>
+        <p:nvSpPr>
+          <p:cNvPr id="5" name="TextBox 4"/>
+          <p:cNvSpPr txBox="1"/>
+          <p:nvPr/>
+        </p:nvSpPr>
+        <p:spPr>
+          <a:xfrm>
+            <a:off x="640080" y="1325880"/>
+            <a:ext cx="10911535" cy="548640"/>
+          </a:xfrm>
+          <a:prstGeom prst="rect">
+            <a:avLst/>
+          </a:prstGeom>
+          <a:noFill/>
+        </p:spPr>
+        <p:txBody>
+          <a:bodyPr wrap="square" anchor="t" lIns="0" rIns="0" tIns="0" bIns="0">
+            <a:spAutoFit/>
+          </a:bodyPr>
+          <a:lstStyle/>
+          <a:p>
+            <a:pPr algn="l">
+              <a:lnSpc>
+                <a:spcPct val="130000"/>
+              </a:lnSpc>
+            </a:pPr>
+            <a:r>
+              <a:rPr sz="2800" b="1">
+                <a:solidFill>
+                  <a:srgbClr val="1C2A33"/>
+                </a:solidFill>
+                <a:latin typeface="楷体"/>
+                <a:ea typeface="楷体"/>
+                <a:cs typeface="楷体"/>
+              </a:rPr>
+              <a:t>分层作业</a:t>
+            </a:r>
+          </a:p>
+        </p:txBody>
+      </p:sp>
+      <p:sp>
+        <p:nvSpPr>
+          <p:cNvPr id="6" name="Rounded Rectangle 5"/>
+          <p:cNvSpPr/>
+          <p:nvPr/>
+        </p:nvSpPr>
+        <p:spPr>
+          <a:xfrm>
+            <a:off x="640080" y="2194560"/>
+            <a:ext cx="5272887" cy="3840480"/>
+          </a:xfrm>
+          <a:prstGeom prst="roundRect">
+            <a:avLst/>
+          </a:prstGeom>
+          <a:solidFill>
+            <a:srgbClr val="FFFFFF"/>
+          </a:solidFill>
+          <a:ln w="20320">
+            <a:solidFill>
+              <a:srgbClr val="B23A2A"/>
+            </a:solidFill>
+          </a:ln>
+          <a:effectLst/>
+        </p:spPr>
+        <p:style>
+          <a:lnRef idx="1">
+            <a:schemeClr val="accent1"/>
+          </a:lnRef>
+          <a:fillRef idx="3">
+            <a:schemeClr val="accent1"/>
+          </a:fillRef>
+          <a:effectRef idx="2">
+            <a:schemeClr val="accent1"/>
+          </a:effectRef>
+          <a:fontRef idx="minor">
+            <a:schemeClr val="lt1"/>
+          </a:fontRef>
+        </p:style>
+        <p:txBody>
+          <a:bodyPr rtlCol="0" anchor="ctr"/>
+          <a:lstStyle/>
+          <a:p>
+            <a:pPr algn="ctr"/>
+          </a:p>
+        </p:txBody>
+      </p:sp>
+      <p:sp>
+        <p:nvSpPr>
+          <p:cNvPr id="7" name="Rectangle 6"/>
+          <p:cNvSpPr/>
+          <p:nvPr/>
+        </p:nvSpPr>
+        <p:spPr>
+          <a:xfrm>
+            <a:off x="640080" y="2194560"/>
+            <a:ext cx="5272887" cy="502920"/>
+          </a:xfrm>
+          <a:prstGeom prst="rect">
+            <a:avLst/>
+          </a:prstGeom>
+          <a:solidFill>
+            <a:srgbClr val="B23A2A"/>
+          </a:solidFill>
+          <a:ln>
+            <a:noFill/>
+          </a:ln>
+          <a:effectLst/>
+        </p:spPr>
+        <p:style>
+          <a:lnRef idx="1">
+            <a:schemeClr val="accent1"/>
+          </a:lnRef>
+          <a:fillRef idx="3">
+            <a:schemeClr val="accent1"/>
+          </a:fillRef>
+          <a:effectRef idx="2">
+            <a:schemeClr val="accent1"/>
+          </a:effectRef>
+          <a:fontRef idx="minor">
+            <a:schemeClr val="lt1"/>
+          </a:fontRef>
+        </p:style>
+        <p:txBody>
+          <a:bodyPr rtlCol="0" anchor="ctr"/>
+          <a:lstStyle/>
+          <a:p>
+            <a:pPr algn="ctr"/>
+          </a:p>
+        </p:txBody>
+      </p:sp>
+      <p:sp>
+        <p:nvSpPr>
+          <p:cNvPr id="8" name="TextBox 7"/>
+          <p:cNvSpPr txBox="1"/>
+          <p:nvPr/>
+        </p:nvSpPr>
+        <p:spPr>
+          <a:xfrm>
+            <a:off x="640080" y="2258568"/>
+            <a:ext cx="5272887" cy="384048"/>
+          </a:xfrm>
+          <a:prstGeom prst="rect">
+            <a:avLst/>
+          </a:prstGeom>
+          <a:noFill/>
+        </p:spPr>
+        <p:txBody>
+          <a:bodyPr wrap="square" anchor="t" lIns="0" rIns="0" tIns="0" bIns="0">
+            <a:spAutoFit/>
+          </a:bodyPr>
+          <a:lstStyle/>
+          <a:p>
+            <a:pPr algn="ctr">
+              <a:lnSpc>
+                <a:spcPct val="120000"/>
+              </a:lnSpc>
+            </a:pPr>
+            <a:r>
+              <a:rPr sz="1600" b="1">
+                <a:solidFill>
+                  <a:srgbClr val="FFFFFF"/>
+                </a:solidFill>
+                <a:latin typeface="微软雅黑"/>
+                <a:ea typeface="微软雅黑"/>
+                <a:cs typeface="微软雅黑"/>
+              </a:rPr>
+              <a:t>基础 · 必做</a:t>
+            </a:r>
+          </a:p>
+        </p:txBody>
+      </p:sp>
+      <p:sp>
+        <p:nvSpPr>
+          <p:cNvPr id="9" name="TextBox 8"/>
+          <p:cNvSpPr txBox="1"/>
+          <p:nvPr/>
+        </p:nvSpPr>
+        <p:spPr>
+          <a:xfrm>
+            <a:off x="914400" y="2880360"/>
+            <a:ext cx="4724247" cy="3017520"/>
+          </a:xfrm>
+          <a:prstGeom prst="rect">
+            <a:avLst/>
+          </a:prstGeom>
+          <a:noFill/>
+        </p:spPr>
+        <p:txBody>
+          <a:bodyPr wrap="square" anchor="t" lIns="0" rIns="0" tIns="0" bIns="0">
+            <a:spAutoFit/>
+          </a:bodyPr>
+          <a:lstStyle/>
+          <a:p>
+            <a:pPr algn="l">
+              <a:lnSpc>
+                <a:spcPct val="155000"/>
+              </a:lnSpc>
+            </a:pPr>
+            <a:r>
+              <a:rPr sz="1350" b="0">
+                <a:solidFill>
+                  <a:srgbClr val="1C2A33"/>
+                </a:solidFill>
+                <a:latin typeface="楷体"/>
+                <a:ea typeface="楷体"/>
+                <a:cs typeface="楷体"/>
+              </a:rPr>
+              <a:t>1. 稳态是指正常机体通过调节作用，使内环境的____性质保持相对稳定的状态。2. 机体维持稳态的主要调节机制是____、体液调节和免疫调节网络。</a:t>
+            </a:r>
+          </a:p>
+        </p:txBody>
+      </p:sp>
+      <p:sp>
+        <p:nvSpPr>
+          <p:cNvPr id="10" name="Rounded Rectangle 9"/>
+          <p:cNvSpPr/>
+          <p:nvPr/>
+        </p:nvSpPr>
+        <p:spPr>
+          <a:xfrm>
+            <a:off x="6278727" y="2194560"/>
+            <a:ext cx="5272887" cy="3840480"/>
+          </a:xfrm>
+          <a:prstGeom prst="roundRect">
+            <a:avLst/>
+          </a:prstGeom>
+          <a:solidFill>
+            <a:srgbClr val="FFFFFF"/>
+          </a:solidFill>
+          <a:ln w="20320">
+            <a:solidFill>
+              <a:srgbClr val="2E7D6B"/>
+            </a:solidFill>
+          </a:ln>
+          <a:effectLst/>
+        </p:spPr>
+        <p:style>
+          <a:lnRef idx="1">
+            <a:schemeClr val="accent1"/>
+          </a:lnRef>
+          <a:fillRef idx="3">
+            <a:schemeClr val="accent1"/>
+          </a:fillRef>
+          <a:effectRef idx="2">
+            <a:schemeClr val="accent1"/>
+          </a:effectRef>
+          <a:fontRef idx="minor">
+            <a:schemeClr val="lt1"/>
+          </a:fontRef>
+        </p:style>
+        <p:txBody>
+          <a:bodyPr rtlCol="0" anchor="ctr"/>
+          <a:lstStyle/>
+          <a:p>
+            <a:pPr algn="ctr"/>
+          </a:p>
+        </p:txBody>
+      </p:sp>
+      <p:sp>
+        <p:nvSpPr>
+          <p:cNvPr id="11" name="Rectangle 10"/>
+          <p:cNvSpPr/>
+          <p:nvPr/>
+        </p:nvSpPr>
+        <p:spPr>
+          <a:xfrm>
+            <a:off x="6278727" y="2194560"/>
+            <a:ext cx="5272887" cy="502920"/>
           </a:xfrm>
           <a:prstGeom prst="rect">
             <a:avLst/>
@@ -7865,60 +8683,14 @@
       </p:sp>
       <p:sp>
         <p:nvSpPr>
-          <p:cNvPr id="5" name="Rounded Rectangle 4"/>
-          <p:cNvSpPr/>
-          <p:nvPr/>
-        </p:nvSpPr>
-        <p:spPr>
-          <a:xfrm>
-            <a:off x="640080" y="1417320"/>
-            <a:ext cx="10911535" cy="1417320"/>
-          </a:xfrm>
-          <a:prstGeom prst="roundRect">
-            <a:avLst/>
-          </a:prstGeom>
-          <a:solidFill>
-            <a:srgbClr val="FFFFFF"/>
-          </a:solidFill>
-          <a:ln w="22860">
-            <a:solidFill>
-              <a:srgbClr val="2E7D6B"/>
-            </a:solidFill>
-          </a:ln>
-          <a:effectLst/>
-        </p:spPr>
-        <p:style>
-          <a:lnRef idx="1">
-            <a:schemeClr val="accent1"/>
-          </a:lnRef>
-          <a:fillRef idx="3">
-            <a:schemeClr val="accent1"/>
-          </a:fillRef>
-          <a:effectRef idx="2">
-            <a:schemeClr val="accent1"/>
-          </a:effectRef>
-          <a:fontRef idx="minor">
-            <a:schemeClr val="lt1"/>
-          </a:fontRef>
-        </p:style>
-        <p:txBody>
-          <a:bodyPr rtlCol="0" anchor="ctr"/>
-          <a:lstStyle/>
-          <a:p>
-            <a:pPr algn="ctr"/>
-          </a:p>
-        </p:txBody>
-      </p:sp>
-      <p:sp>
-        <p:nvSpPr>
-          <p:cNvPr id="6" name="TextBox 5"/>
+          <p:cNvPr id="12" name="TextBox 11"/>
           <p:cNvSpPr txBox="1"/>
           <p:nvPr/>
         </p:nvSpPr>
         <p:spPr>
           <a:xfrm>
-            <a:off x="1371600" y="1527048"/>
-            <a:ext cx="9997135" cy="457200"/>
+            <a:off x="6278727" y="2258568"/>
+            <a:ext cx="5272887" cy="384048"/>
           </a:xfrm>
           <a:prstGeom prst="rect">
             <a:avLst/>
@@ -7931,35 +8703,35 @@
           </a:bodyPr>
           <a:lstStyle/>
           <a:p>
-            <a:pPr algn="l">
+            <a:pPr algn="ctr">
               <a:lnSpc>
-                <a:spcPct val="110000"/>
+                <a:spcPct val="120000"/>
               </a:lnSpc>
             </a:pPr>
             <a:r>
               <a:rPr sz="1600" b="1">
                 <a:solidFill>
-                  <a:srgbClr val="1C2A33"/>
+                  <a:srgbClr val="FFFFFF"/>
                 </a:solidFill>
                 <a:latin typeface="微软雅黑"/>
                 <a:ea typeface="微软雅黑"/>
                 <a:cs typeface="微软雅黑"/>
               </a:rPr>
-              <a:t/>
-            </a:r>
-          </a:p>
-        </p:txBody>
-      </p:sp>
-      <p:sp>
-        <p:nvSpPr>
-          <p:cNvPr id="7" name="TextBox 6"/>
+              <a:t>提高 · 选做</a:t>
+            </a:r>
+          </a:p>
+        </p:txBody>
+      </p:sp>
+      <p:sp>
+        <p:nvSpPr>
+          <p:cNvPr id="13" name="TextBox 12"/>
           <p:cNvSpPr txBox="1"/>
           <p:nvPr/>
         </p:nvSpPr>
         <p:spPr>
           <a:xfrm>
-            <a:off x="1371600" y="1965960"/>
-            <a:ext cx="9997135" cy="777240"/>
+            <a:off x="6553047" y="2880360"/>
+            <a:ext cx="4724247" cy="3017520"/>
           </a:xfrm>
           <a:prstGeom prst="rect">
             <a:avLst/>
@@ -7974,11 +8746,11 @@
           <a:p>
             <a:pPr algn="l">
               <a:lnSpc>
-                <a:spcPct val="128000"/>
+                <a:spcPct val="155000"/>
               </a:lnSpc>
             </a:pPr>
             <a:r>
-              <a:rPr sz="1100" b="0">
+              <a:rPr sz="1350" b="0">
                 <a:solidFill>
                   <a:srgbClr val="1C2A33"/>
                 </a:solidFill>
@@ -7986,142 +8758,14 @@
                 <a:ea typeface="楷体"/>
                 <a:cs typeface="楷体"/>
               </a:rPr>
-              <a:t>【基础作业】1. 稳态是指正常机体通过调节作用，使内环境的____性质保持相对稳定的状态。2. 机体维持稳态的主要调节机制是____、体液调节和免疫调节网络。</a:t>
-            </a:r>
-          </a:p>
-        </p:txBody>
-      </p:sp>
-      <p:sp>
-        <p:nvSpPr>
-          <p:cNvPr id="8" name="Rounded Rectangle 7"/>
-          <p:cNvSpPr/>
-          <p:nvPr/>
-        </p:nvSpPr>
-        <p:spPr>
-          <a:xfrm>
-            <a:off x="640080" y="2971800"/>
-            <a:ext cx="10911535" cy="1417320"/>
-          </a:xfrm>
-          <a:prstGeom prst="roundRect">
-            <a:avLst/>
-          </a:prstGeom>
-          <a:solidFill>
-            <a:srgbClr val="FFFFFF"/>
-          </a:solidFill>
-          <a:ln w="22860">
-            <a:solidFill>
-              <a:srgbClr val="2E7D6B"/>
-            </a:solidFill>
-          </a:ln>
-          <a:effectLst/>
-        </p:spPr>
-        <p:style>
-          <a:lnRef idx="1">
-            <a:schemeClr val="accent1"/>
-          </a:lnRef>
-          <a:fillRef idx="3">
-            <a:schemeClr val="accent1"/>
-          </a:fillRef>
-          <a:effectRef idx="2">
-            <a:schemeClr val="accent1"/>
-          </a:effectRef>
-          <a:fontRef idx="minor">
-            <a:schemeClr val="lt1"/>
-          </a:fontRef>
-        </p:style>
-        <p:txBody>
-          <a:bodyPr rtlCol="0" anchor="ctr"/>
-          <a:lstStyle/>
-          <a:p>
-            <a:pPr algn="ctr"/>
-          </a:p>
-        </p:txBody>
-      </p:sp>
-      <p:sp>
-        <p:nvSpPr>
-          <p:cNvPr id="9" name="TextBox 8"/>
-          <p:cNvSpPr txBox="1"/>
-          <p:nvPr/>
-        </p:nvSpPr>
-        <p:spPr>
-          <a:xfrm>
-            <a:off x="1371600" y="3081528"/>
-            <a:ext cx="9997135" cy="457200"/>
-          </a:xfrm>
-          <a:prstGeom prst="rect">
-            <a:avLst/>
-          </a:prstGeom>
-          <a:noFill/>
-        </p:spPr>
-        <p:txBody>
-          <a:bodyPr wrap="square" anchor="t" lIns="0" rIns="0" tIns="0" bIns="0">
-            <a:spAutoFit/>
-          </a:bodyPr>
-          <a:lstStyle/>
-          <a:p>
-            <a:pPr algn="l">
-              <a:lnSpc>
-                <a:spcPct val="110000"/>
-              </a:lnSpc>
-            </a:pPr>
-            <a:r>
-              <a:rPr sz="1600" b="1">
-                <a:solidFill>
-                  <a:srgbClr val="1C2A33"/>
-                </a:solidFill>
-                <a:latin typeface="微软雅黑"/>
-                <a:ea typeface="微软雅黑"/>
-                <a:cs typeface="微软雅黑"/>
-              </a:rPr>
-              <a:t/>
-            </a:r>
-          </a:p>
-        </p:txBody>
-      </p:sp>
-      <p:sp>
-        <p:nvSpPr>
-          <p:cNvPr id="10" name="TextBox 9"/>
-          <p:cNvSpPr txBox="1"/>
-          <p:nvPr/>
-        </p:nvSpPr>
-        <p:spPr>
-          <a:xfrm>
-            <a:off x="1371600" y="3520440"/>
-            <a:ext cx="9997135" cy="777240"/>
-          </a:xfrm>
-          <a:prstGeom prst="rect">
-            <a:avLst/>
-          </a:prstGeom>
-          <a:noFill/>
-        </p:spPr>
-        <p:txBody>
-          <a:bodyPr wrap="square" anchor="t" lIns="0" rIns="0" tIns="0" bIns="0">
-            <a:spAutoFit/>
-          </a:bodyPr>
-          <a:lstStyle/>
-          <a:p>
-            <a:pPr algn="l">
-              <a:lnSpc>
-                <a:spcPct val="128000"/>
-              </a:lnSpc>
-            </a:pPr>
-            <a:r>
-              <a:rPr sz="1400" b="0">
-                <a:solidFill>
-                  <a:srgbClr val="1C2A33"/>
-                </a:solidFill>
-                <a:latin typeface="楷体"/>
-                <a:ea typeface="楷体"/>
-                <a:cs typeface="楷体"/>
-              </a:rPr>
-              <a:t>【提高作业】为什么说稳态是机体进行正常生命活动的必要条件？</a:t>
-            </a:r>
-          </a:p>
-        </p:txBody>
-      </p:sp>
-      <p:sp>
-        <p:nvSpPr>
-          <p:cNvPr id="11" name="TextBox 10"/>
+              <a:t>为什么说稳态是机体进行正常生命活动的必要条件？</a:t>
+            </a:r>
+          </a:p>
+        </p:txBody>
+      </p:sp>
+      <p:sp>
+        <p:nvSpPr>
+          <p:cNvPr id="14" name="TextBox 13"/>
           <p:cNvSpPr txBox="1"/>
           <p:nvPr/>
         </p:nvSpPr>
@@ -8248,13 +8892,13 @@
             <a:r>
               <a:rPr sz="1300" b="1">
                 <a:solidFill>
-                  <a:srgbClr val="C8A86B"/>
+                  <a:srgbClr val="B23A2A"/>
                 </a:solidFill>
                 <a:latin typeface="微软雅黑"/>
                 <a:ea typeface="微软雅黑"/>
                 <a:cs typeface="微软雅黑"/>
               </a:rPr>
-              <a:t>本课小结</a:t>
+              <a:t>单元小结</a:t>
             </a:r>
           </a:p>
         </p:txBody>
@@ -8269,6 +8913,399 @@
           <a:xfrm>
             <a:off x="640080" y="1097280"/>
             <a:ext cx="822960" cy="30480"/>
+          </a:xfrm>
+          <a:prstGeom prst="rect">
+            <a:avLst/>
+          </a:prstGeom>
+          <a:solidFill>
+            <a:srgbClr val="B23A2A"/>
+          </a:solidFill>
+          <a:ln>
+            <a:noFill/>
+          </a:ln>
+          <a:effectLst/>
+        </p:spPr>
+        <p:style>
+          <a:lnRef idx="1">
+            <a:schemeClr val="accent1"/>
+          </a:lnRef>
+          <a:fillRef idx="3">
+            <a:schemeClr val="accent1"/>
+          </a:fillRef>
+          <a:effectRef idx="2">
+            <a:schemeClr val="accent1"/>
+          </a:effectRef>
+          <a:fontRef idx="minor">
+            <a:schemeClr val="lt1"/>
+          </a:fontRef>
+        </p:style>
+        <p:txBody>
+          <a:bodyPr rtlCol="0" anchor="ctr"/>
+          <a:lstStyle/>
+          <a:p>
+            <a:pPr algn="ctr"/>
+          </a:p>
+        </p:txBody>
+      </p:sp>
+      <p:sp>
+        <p:nvSpPr>
+          <p:cNvPr id="5" name="TextBox 4"/>
+          <p:cNvSpPr txBox="1"/>
+          <p:nvPr/>
+        </p:nvSpPr>
+        <p:spPr>
+          <a:xfrm>
+            <a:off x="640080" y="1325880"/>
+            <a:ext cx="10911535" cy="548640"/>
+          </a:xfrm>
+          <a:prstGeom prst="rect">
+            <a:avLst/>
+          </a:prstGeom>
+          <a:noFill/>
+        </p:spPr>
+        <p:txBody>
+          <a:bodyPr wrap="square" anchor="t" lIns="0" rIns="0" tIns="0" bIns="0">
+            <a:spAutoFit/>
+          </a:bodyPr>
+          <a:lstStyle/>
+          <a:p>
+            <a:pPr algn="l">
+              <a:lnSpc>
+                <a:spcPct val="130000"/>
+              </a:lnSpc>
+            </a:pPr>
+            <a:r>
+              <a:rPr sz="2800" b="1">
+                <a:solidFill>
+                  <a:srgbClr val="1C2A33"/>
+                </a:solidFill>
+                <a:latin typeface="楷体"/>
+                <a:ea typeface="楷体"/>
+                <a:cs typeface="楷体"/>
+              </a:rPr>
+              <a:t>回顾与衔接</a:t>
+            </a:r>
+          </a:p>
+        </p:txBody>
+      </p:sp>
+      <p:sp>
+        <p:nvSpPr>
+          <p:cNvPr id="6" name="Rounded Rectangle 5"/>
+          <p:cNvSpPr/>
+          <p:nvPr/>
+        </p:nvSpPr>
+        <p:spPr>
+          <a:xfrm>
+            <a:off x="640080" y="2103120"/>
+            <a:ext cx="10911535" cy="731520"/>
+          </a:xfrm>
+          <a:prstGeom prst="roundRect">
+            <a:avLst/>
+          </a:prstGeom>
+          <a:solidFill>
+            <a:srgbClr val="FFFFFF"/>
+          </a:solidFill>
+          <a:ln w="16510">
+            <a:solidFill>
+              <a:srgbClr val="B23A2A"/>
+            </a:solidFill>
+          </a:ln>
+          <a:effectLst/>
+        </p:spPr>
+        <p:style>
+          <a:lnRef idx="1">
+            <a:schemeClr val="accent1"/>
+          </a:lnRef>
+          <a:fillRef idx="3">
+            <a:schemeClr val="accent1"/>
+          </a:fillRef>
+          <a:effectRef idx="2">
+            <a:schemeClr val="accent1"/>
+          </a:effectRef>
+          <a:fontRef idx="minor">
+            <a:schemeClr val="lt1"/>
+          </a:fontRef>
+        </p:style>
+        <p:txBody>
+          <a:bodyPr rtlCol="0" anchor="ctr"/>
+          <a:lstStyle/>
+          <a:p>
+            <a:pPr algn="ctr"/>
+          </a:p>
+        </p:txBody>
+      </p:sp>
+      <p:sp>
+        <p:nvSpPr>
+          <p:cNvPr id="7" name="Rectangle 6"/>
+          <p:cNvSpPr/>
+          <p:nvPr/>
+        </p:nvSpPr>
+        <p:spPr>
+          <a:xfrm>
+            <a:off x="640080" y="2103120"/>
+            <a:ext cx="109728" cy="731520"/>
+          </a:xfrm>
+          <a:prstGeom prst="rect">
+            <a:avLst/>
+          </a:prstGeom>
+          <a:solidFill>
+            <a:srgbClr val="B23A2A"/>
+          </a:solidFill>
+          <a:ln>
+            <a:noFill/>
+          </a:ln>
+          <a:effectLst/>
+        </p:spPr>
+        <p:style>
+          <a:lnRef idx="1">
+            <a:schemeClr val="accent1"/>
+          </a:lnRef>
+          <a:fillRef idx="3">
+            <a:schemeClr val="accent1"/>
+          </a:fillRef>
+          <a:effectRef idx="2">
+            <a:schemeClr val="accent1"/>
+          </a:effectRef>
+          <a:fontRef idx="minor">
+            <a:schemeClr val="lt1"/>
+          </a:fontRef>
+        </p:style>
+        <p:txBody>
+          <a:bodyPr rtlCol="0" anchor="ctr"/>
+          <a:lstStyle/>
+          <a:p>
+            <a:pPr algn="ctr"/>
+          </a:p>
+        </p:txBody>
+      </p:sp>
+      <p:sp>
+        <p:nvSpPr>
+          <p:cNvPr id="8" name="TextBox 7"/>
+          <p:cNvSpPr txBox="1"/>
+          <p:nvPr/>
+        </p:nvSpPr>
+        <p:spPr>
+          <a:xfrm>
+            <a:off x="960120" y="2103120"/>
+            <a:ext cx="10362895" cy="731520"/>
+          </a:xfrm>
+          <a:prstGeom prst="rect">
+            <a:avLst/>
+          </a:prstGeom>
+          <a:noFill/>
+        </p:spPr>
+        <p:txBody>
+          <a:bodyPr wrap="square" anchor="ctr" lIns="0" rIns="0" tIns="0" bIns="0">
+            <a:spAutoFit/>
+          </a:bodyPr>
+          <a:lstStyle/>
+          <a:p>
+            <a:pPr algn="l">
+              <a:lnSpc>
+                <a:spcPct val="130000"/>
+              </a:lnSpc>
+            </a:pPr>
+            <a:r>
+              <a:rPr sz="1350" b="0">
+                <a:solidFill>
+                  <a:srgbClr val="1C2A33"/>
+                </a:solidFill>
+                <a:latin typeface="楷体"/>
+                <a:ea typeface="楷体"/>
+                <a:cs typeface="楷体"/>
+              </a:rPr>
+              <a:t>◆ ① 稳态：内环境理化性质（渗透压、pH、温度）保持相对稳定。</a:t>
+            </a:r>
+          </a:p>
+        </p:txBody>
+      </p:sp>
+      <p:sp>
+        <p:nvSpPr>
+          <p:cNvPr id="9" name="Rounded Rectangle 8"/>
+          <p:cNvSpPr/>
+          <p:nvPr/>
+        </p:nvSpPr>
+        <p:spPr>
+          <a:xfrm>
+            <a:off x="640080" y="2971800"/>
+            <a:ext cx="10911535" cy="731520"/>
+          </a:xfrm>
+          <a:prstGeom prst="roundRect">
+            <a:avLst/>
+          </a:prstGeom>
+          <a:solidFill>
+            <a:srgbClr val="FFFFFF"/>
+          </a:solidFill>
+          <a:ln w="16510">
+            <a:solidFill>
+              <a:srgbClr val="2E7D6B"/>
+            </a:solidFill>
+          </a:ln>
+          <a:effectLst/>
+        </p:spPr>
+        <p:style>
+          <a:lnRef idx="1">
+            <a:schemeClr val="accent1"/>
+          </a:lnRef>
+          <a:fillRef idx="3">
+            <a:schemeClr val="accent1"/>
+          </a:fillRef>
+          <a:effectRef idx="2">
+            <a:schemeClr val="accent1"/>
+          </a:effectRef>
+          <a:fontRef idx="minor">
+            <a:schemeClr val="lt1"/>
+          </a:fontRef>
+        </p:style>
+        <p:txBody>
+          <a:bodyPr rtlCol="0" anchor="ctr"/>
+          <a:lstStyle/>
+          <a:p>
+            <a:pPr algn="ctr"/>
+          </a:p>
+        </p:txBody>
+      </p:sp>
+      <p:sp>
+        <p:nvSpPr>
+          <p:cNvPr id="10" name="Rectangle 9"/>
+          <p:cNvSpPr/>
+          <p:nvPr/>
+        </p:nvSpPr>
+        <p:spPr>
+          <a:xfrm>
+            <a:off x="640080" y="2971800"/>
+            <a:ext cx="109728" cy="731520"/>
+          </a:xfrm>
+          <a:prstGeom prst="rect">
+            <a:avLst/>
+          </a:prstGeom>
+          <a:solidFill>
+            <a:srgbClr val="2E7D6B"/>
+          </a:solidFill>
+          <a:ln>
+            <a:noFill/>
+          </a:ln>
+          <a:effectLst/>
+        </p:spPr>
+        <p:style>
+          <a:lnRef idx="1">
+            <a:schemeClr val="accent1"/>
+          </a:lnRef>
+          <a:fillRef idx="3">
+            <a:schemeClr val="accent1"/>
+          </a:fillRef>
+          <a:effectRef idx="2">
+            <a:schemeClr val="accent1"/>
+          </a:effectRef>
+          <a:fontRef idx="minor">
+            <a:schemeClr val="lt1"/>
+          </a:fontRef>
+        </p:style>
+        <p:txBody>
+          <a:bodyPr rtlCol="0" anchor="ctr"/>
+          <a:lstStyle/>
+          <a:p>
+            <a:pPr algn="ctr"/>
+          </a:p>
+        </p:txBody>
+      </p:sp>
+      <p:sp>
+        <p:nvSpPr>
+          <p:cNvPr id="11" name="TextBox 10"/>
+          <p:cNvSpPr txBox="1"/>
+          <p:nvPr/>
+        </p:nvSpPr>
+        <p:spPr>
+          <a:xfrm>
+            <a:off x="960120" y="2971800"/>
+            <a:ext cx="10362895" cy="731520"/>
+          </a:xfrm>
+          <a:prstGeom prst="rect">
+            <a:avLst/>
+          </a:prstGeom>
+          <a:noFill/>
+        </p:spPr>
+        <p:txBody>
+          <a:bodyPr wrap="square" anchor="ctr" lIns="0" rIns="0" tIns="0" bIns="0">
+            <a:spAutoFit/>
+          </a:bodyPr>
+          <a:lstStyle/>
+          <a:p>
+            <a:pPr algn="l">
+              <a:lnSpc>
+                <a:spcPct val="130000"/>
+              </a:lnSpc>
+            </a:pPr>
+            <a:r>
+              <a:rPr sz="1350" b="0">
+                <a:solidFill>
+                  <a:srgbClr val="1C2A33"/>
+                </a:solidFill>
+                <a:latin typeface="楷体"/>
+                <a:ea typeface="楷体"/>
+                <a:cs typeface="楷体"/>
+              </a:rPr>
+              <a:t>◆ ② "相对稳定"≠恒定，是动态平衡（一定范围内波动）。</a:t>
+            </a:r>
+          </a:p>
+        </p:txBody>
+      </p:sp>
+      <p:sp>
+        <p:nvSpPr>
+          <p:cNvPr id="12" name="Rounded Rectangle 11"/>
+          <p:cNvSpPr/>
+          <p:nvPr/>
+        </p:nvSpPr>
+        <p:spPr>
+          <a:xfrm>
+            <a:off x="640080" y="3840480"/>
+            <a:ext cx="10911535" cy="731520"/>
+          </a:xfrm>
+          <a:prstGeom prst="roundRect">
+            <a:avLst/>
+          </a:prstGeom>
+          <a:solidFill>
+            <a:srgbClr val="FFFFFF"/>
+          </a:solidFill>
+          <a:ln w="16510">
+            <a:solidFill>
+              <a:srgbClr val="C8A86B"/>
+            </a:solidFill>
+          </a:ln>
+          <a:effectLst/>
+        </p:spPr>
+        <p:style>
+          <a:lnRef idx="1">
+            <a:schemeClr val="accent1"/>
+          </a:lnRef>
+          <a:fillRef idx="3">
+            <a:schemeClr val="accent1"/>
+          </a:fillRef>
+          <a:effectRef idx="2">
+            <a:schemeClr val="accent1"/>
+          </a:effectRef>
+          <a:fontRef idx="minor">
+            <a:schemeClr val="lt1"/>
+          </a:fontRef>
+        </p:style>
+        <p:txBody>
+          <a:bodyPr rtlCol="0" anchor="ctr"/>
+          <a:lstStyle/>
+          <a:p>
+            <a:pPr algn="ctr"/>
+          </a:p>
+        </p:txBody>
+      </p:sp>
+      <p:sp>
+        <p:nvSpPr>
+          <p:cNvPr id="13" name="Rectangle 12"/>
+          <p:cNvSpPr/>
+          <p:nvPr/>
+        </p:nvSpPr>
+        <p:spPr>
+          <a:xfrm>
+            <a:off x="640080" y="3840480"/>
+            <a:ext cx="109728" cy="731520"/>
           </a:xfrm>
           <a:prstGeom prst="rect">
             <a:avLst/>
@@ -8305,20 +9342,61 @@
       </p:sp>
       <p:sp>
         <p:nvSpPr>
-          <p:cNvPr id="5" name="Rectangle 4"/>
+          <p:cNvPr id="14" name="TextBox 13"/>
+          <p:cNvSpPr txBox="1"/>
+          <p:nvPr/>
+        </p:nvSpPr>
+        <p:spPr>
+          <a:xfrm>
+            <a:off x="960120" y="3840480"/>
+            <a:ext cx="10362895" cy="731520"/>
+          </a:xfrm>
+          <a:prstGeom prst="rect">
+            <a:avLst/>
+          </a:prstGeom>
+          <a:noFill/>
+        </p:spPr>
+        <p:txBody>
+          <a:bodyPr wrap="square" anchor="ctr" lIns="0" rIns="0" tIns="0" bIns="0">
+            <a:spAutoFit/>
+          </a:bodyPr>
+          <a:lstStyle/>
+          <a:p>
+            <a:pPr algn="l">
+              <a:lnSpc>
+                <a:spcPct val="130000"/>
+              </a:lnSpc>
+            </a:pPr>
+            <a:r>
+              <a:rPr sz="1350" b="0">
+                <a:solidFill>
+                  <a:srgbClr val="1C2A33"/>
+                </a:solidFill>
+                <a:latin typeface="楷体"/>
+                <a:ea typeface="楷体"/>
+                <a:cs typeface="楷体"/>
+              </a:rPr>
+              <a:t>◆ ③ 调节网络：神经-体液-免疫调节。</a:t>
+            </a:r>
+          </a:p>
+        </p:txBody>
+      </p:sp>
+      <p:sp>
+        <p:nvSpPr>
+          <p:cNvPr id="15" name="Rectangle 14"/>
           <p:cNvSpPr/>
           <p:nvPr/>
         </p:nvSpPr>
         <p:spPr>
           <a:xfrm>
-            <a:off x="640080" y="1737360"/>
-            <a:ext cx="54864" cy="431800"/>
+            <a:off x="640080" y="4846320"/>
+            <a:ext cx="10911535" cy="1143000"/>
           </a:xfrm>
           <a:prstGeom prst="rect">
             <a:avLst/>
           </a:prstGeom>
           <a:solidFill>
-            <a:srgbClr val="C8A86B"/>
+            <a:srgbClr val="1C2A33"/>
           </a:solidFill>
           <a:ln>
             <a:noFill/>
@@ -8349,14 +9427,14 @@
       </p:sp>
       <p:sp>
         <p:nvSpPr>
-          <p:cNvPr id="6" name="TextBox 5"/>
+          <p:cNvPr id="16" name="TextBox 15"/>
           <p:cNvSpPr txBox="1"/>
           <p:nvPr/>
         </p:nvSpPr>
         <p:spPr>
           <a:xfrm>
-            <a:off x="868680" y="1645920"/>
-            <a:ext cx="10682935" cy="2194560"/>
+            <a:off x="914400" y="4956048"/>
+            <a:ext cx="10362895" cy="914400"/>
           </a:xfrm>
           <a:prstGeom prst="rect">
             <a:avLst/>
@@ -8371,43 +9449,47 @@
           <a:p>
             <a:pPr algn="l">
               <a:lnSpc>
-                <a:spcPct val="150000"/>
+                <a:spcPct val="140000"/>
               </a:lnSpc>
               <a:spcAft>
-                <a:spcPts val="1000"/>
+                <a:spcPts val="400"/>
               </a:spcAft>
             </a:pPr>
             <a:r>
-              <a:rPr sz="2200" b="0">
-                <a:solidFill>
-                  <a:srgbClr val="1C2A33"/>
+              <a:rPr sz="1400" b="1">
+                <a:solidFill>
+                  <a:srgbClr val="C8A86B"/>
                 </a:solidFill>
                 <a:latin typeface="楷体"/>
                 <a:ea typeface="楷体"/>
                 <a:cs typeface="楷体"/>
               </a:rPr>
-              <a:t>本单元主题：人体的内环境与稳态。把今天学到的方法带进下一篇——自己读、自己想、自己写。</a:t>
-            </a:r>
-          </a:p>
-          <a:p>
-            <a:pPr algn="l"/>
-            <a:r>
-              <a:rPr sz="1600" b="1">
-                <a:solidFill>
-                  <a:srgbClr val="B23A2A"/>
+              <a:t>下节课衔接：神经调节的结构基础</a:t>
+            </a:r>
+          </a:p>
+          <a:p>
+            <a:pPr algn="l">
+              <a:lnSpc>
+                <a:spcPct val="130000"/>
+              </a:lnSpc>
+            </a:pPr>
+            <a:r>
+              <a:rPr sz="1150" b="0">
+                <a:solidFill>
+                  <a:srgbClr val="E7DFD2"/>
                 </a:solidFill>
                 <a:latin typeface="微软雅黑"/>
                 <a:ea typeface="微软雅黑"/>
                 <a:cs typeface="微软雅黑"/>
               </a:rPr>
-              <a:t>方法迁移：圈关键信息 → 理事件脉络 → 析人物精神</a:t>
-            </a:r>
-          </a:p>
-        </p:txBody>
-      </p:sp>
-      <p:sp>
-        <p:nvSpPr>
-          <p:cNvPr id="7" name="TextBox 6"/>
+              <a:t>本课件未使用无关配图，以学科色块呈现；要点以教材为准。</a:t>
+            </a:r>
+          </a:p>
+        </p:txBody>
+      </p:sp>
+      <p:sp>
+        <p:nvSpPr>
+          <p:cNvPr id="17" name="TextBox 16"/>
           <p:cNvSpPr txBox="1"/>
           <p:nvPr/>
         </p:nvSpPr>
